--- a/Week_4/Unit_Testing_&_Logging.pptx
+++ b/Week_4/Unit_Testing_&_Logging.pptx
@@ -7,7 +7,20 @@
   <p:sldIdLst>
     <p:sldId id="256" r:id="rId2"/>
     <p:sldId id="263" r:id="rId3"/>
-    <p:sldId id="262" r:id="rId4"/>
+    <p:sldId id="264" r:id="rId4"/>
+    <p:sldId id="265" r:id="rId5"/>
+    <p:sldId id="266" r:id="rId6"/>
+    <p:sldId id="267" r:id="rId7"/>
+    <p:sldId id="268" r:id="rId8"/>
+    <p:sldId id="269" r:id="rId9"/>
+    <p:sldId id="270" r:id="rId10"/>
+    <p:sldId id="271" r:id="rId11"/>
+    <p:sldId id="274" r:id="rId12"/>
+    <p:sldId id="272" r:id="rId13"/>
+    <p:sldId id="273" r:id="rId14"/>
+    <p:sldId id="276" r:id="rId15"/>
+    <p:sldId id="275" r:id="rId16"/>
+    <p:sldId id="262" r:id="rId17"/>
   </p:sldIdLst>
   <p:sldSz cx="12192000" cy="6858000"/>
   <p:notesSz cx="6858000" cy="9144000"/>
@@ -3969,7 +3982,7 @@
 </p:sld>
 </file>
 
-<file path=ppt/slides/slide2.xml><?xml version="1.0" encoding="utf-8"?>
+<file path=ppt/slides/slide10.xml><?xml version="1.0" encoding="utf-8"?>
 <p:sld xmlns:a="http://schemas.openxmlformats.org/drawingml/2006/main" xmlns:r="http://schemas.openxmlformats.org/officeDocument/2006/relationships" xmlns:p="http://schemas.openxmlformats.org/presentationml/2006/main">
   <p:cSld>
     <p:spTree>
@@ -3991,7 +4004,7 @@
           <p:cNvPr id="2" name="Title 1">
             <a:extLst>
               <a:ext uri="{FF2B5EF4-FFF2-40B4-BE49-F238E27FC236}">
-                <a16:creationId xmlns:a16="http://schemas.microsoft.com/office/drawing/2014/main" id="{4857AA5D-C488-43A5-3D64-B1D6D0512005}"/>
+                <a16:creationId xmlns:a16="http://schemas.microsoft.com/office/drawing/2014/main" id="{5E86D869-D3D5-20B3-4FFA-D28F0DB3991F}"/>
               </a:ext>
             </a:extLst>
           </p:cNvPr>
@@ -4008,8 +4021,12 @@
           <a:lstStyle/>
           <a:p>
             <a:r>
-              <a:rPr lang="en-US" dirty="0"/>
-              <a:t>Unit Testing</a:t>
+              <a:rPr lang="en-US" dirty="0" err="1"/>
+              <a:t>Inmemory</a:t>
+            </a:r>
+            <a:r>
+              <a:rPr lang="en-US" dirty="0"/>
+              <a:t> mocks vs Mockito</a:t>
             </a:r>
           </a:p>
         </p:txBody>
@@ -4019,7 +4036,7 @@
           <p:cNvPr id="3" name="Content Placeholder 2">
             <a:extLst>
               <a:ext uri="{FF2B5EF4-FFF2-40B4-BE49-F238E27FC236}">
-                <a16:creationId xmlns:a16="http://schemas.microsoft.com/office/drawing/2014/main" id="{453E4FDB-A8F2-71B7-3D5E-5E3B4C62CE16}"/>
+                <a16:creationId xmlns:a16="http://schemas.microsoft.com/office/drawing/2014/main" id="{B1A9673F-0C70-B658-C450-BD913A704315}"/>
               </a:ext>
             </a:extLst>
           </p:cNvPr>
@@ -4037,11 +4054,20 @@
           <a:p>
             <a:r>
               <a:rPr lang="en-US" dirty="0"/>
-              <a:t>Unit testing is the practice of testing a small, isolated piece </a:t>
-            </a:r>
-            <a:r>
-              <a:rPr lang="en-US"/>
-              <a:t>of software</a:t>
+              <a:t>You can check out ‘InMemoryJunitExample.java’ for examples WITHOUT Mockito</a:t>
+            </a:r>
+          </a:p>
+          <a:p>
+            <a:r>
+              <a:rPr lang="en-US" dirty="0"/>
+              <a:t>Mockito is a Java mocking framework used to create fake or simulated versions of objects that our code depends on</a:t>
+            </a:r>
+          </a:p>
+          <a:p>
+            <a:pPr lvl="1"/>
+            <a:r>
+              <a:rPr lang="en-US" dirty="0"/>
+              <a:t>This helps us test classes in isolation</a:t>
             </a:r>
           </a:p>
         </p:txBody>
@@ -4049,7 +4075,7 @@
     </p:spTree>
     <p:extLst>
       <p:ext uri="{BB962C8B-B14F-4D97-AF65-F5344CB8AC3E}">
-        <p14:creationId xmlns:p14="http://schemas.microsoft.com/office/powerpoint/2010/main" val="1270905194"/>
+        <p14:creationId xmlns:p14="http://schemas.microsoft.com/office/powerpoint/2010/main" val="664252885"/>
       </p:ext>
     </p:extLst>
   </p:cSld>
@@ -4059,7 +4085,1079 @@
 </p:sld>
 </file>
 
-<file path=ppt/slides/slide3.xml><?xml version="1.0" encoding="utf-8"?>
+<file path=ppt/slides/slide11.xml><?xml version="1.0" encoding="utf-8"?>
+<p:sld xmlns:a="http://schemas.openxmlformats.org/drawingml/2006/main" xmlns:r="http://schemas.openxmlformats.org/officeDocument/2006/relationships" xmlns:p="http://schemas.openxmlformats.org/presentationml/2006/main">
+  <p:cSld>
+    <p:spTree>
+      <p:nvGrpSpPr>
+        <p:cNvPr id="1" name=""/>
+        <p:cNvGrpSpPr/>
+        <p:nvPr/>
+      </p:nvGrpSpPr>
+      <p:grpSpPr>
+        <a:xfrm>
+          <a:off x="0" y="0"/>
+          <a:ext cx="0" cy="0"/>
+          <a:chOff x="0" y="0"/>
+          <a:chExt cx="0" cy="0"/>
+        </a:xfrm>
+      </p:grpSpPr>
+      <p:sp>
+        <p:nvSpPr>
+          <p:cNvPr id="2" name="Title 1">
+            <a:extLst>
+              <a:ext uri="{FF2B5EF4-FFF2-40B4-BE49-F238E27FC236}">
+                <a16:creationId xmlns:a16="http://schemas.microsoft.com/office/drawing/2014/main" id="{6F2971FE-5D97-7639-8728-6AD53330875D}"/>
+              </a:ext>
+            </a:extLst>
+          </p:cNvPr>
+          <p:cNvSpPr>
+            <a:spLocks noGrp="1"/>
+          </p:cNvSpPr>
+          <p:nvPr>
+            <p:ph type="title"/>
+          </p:nvPr>
+        </p:nvSpPr>
+        <p:spPr/>
+        <p:txBody>
+          <a:bodyPr/>
+          <a:lstStyle/>
+          <a:p>
+            <a:r>
+              <a:rPr lang="en-US" dirty="0"/>
+              <a:t>Junit lifecycle annotations</a:t>
+            </a:r>
+          </a:p>
+        </p:txBody>
+      </p:sp>
+      <p:graphicFrame>
+        <p:nvGraphicFramePr>
+          <p:cNvPr id="4" name="Table 3">
+            <a:extLst>
+              <a:ext uri="{FF2B5EF4-FFF2-40B4-BE49-F238E27FC236}">
+                <a16:creationId xmlns:a16="http://schemas.microsoft.com/office/drawing/2014/main" id="{A94A887F-74C4-DB73-8226-EA5E2EEB1F5E}"/>
+              </a:ext>
+            </a:extLst>
+          </p:cNvPr>
+          <p:cNvGraphicFramePr>
+            <a:graphicFrameLocks noGrp="1"/>
+          </p:cNvGraphicFramePr>
+          <p:nvPr>
+            <p:extLst>
+              <p:ext uri="{D42A27DB-BD31-4B8C-83A1-F6EECF244321}">
+                <p14:modId xmlns:p14="http://schemas.microsoft.com/office/powerpoint/2010/main" val="4276476074"/>
+              </p:ext>
+            </p:extLst>
+          </p:nvPr>
+        </p:nvGraphicFramePr>
+        <p:xfrm>
+          <a:off x="639547" y="2341690"/>
+          <a:ext cx="11029950" cy="1828800"/>
+        </p:xfrm>
+        <a:graphic>
+          <a:graphicData uri="http://schemas.openxmlformats.org/drawingml/2006/table">
+            <a:tbl>
+              <a:tblPr>
+                <a:tableStyleId>{5C22544A-7EE6-4342-B048-85BDC9FD1C3A}</a:tableStyleId>
+              </a:tblPr>
+              <a:tblGrid>
+                <a:gridCol w="5514975">
+                  <a:extLst>
+                    <a:ext uri="{9D8B030D-6E8A-4147-A177-3AD203B41FA5}">
+                      <a16:colId xmlns:a16="http://schemas.microsoft.com/office/drawing/2014/main" val="2526180348"/>
+                    </a:ext>
+                  </a:extLst>
+                </a:gridCol>
+                <a:gridCol w="5514975">
+                  <a:extLst>
+                    <a:ext uri="{9D8B030D-6E8A-4147-A177-3AD203B41FA5}">
+                      <a16:colId xmlns:a16="http://schemas.microsoft.com/office/drawing/2014/main" val="2398276550"/>
+                    </a:ext>
+                  </a:extLst>
+                </a:gridCol>
+              </a:tblGrid>
+              <a:tr h="0">
+                <a:tc>
+                  <a:txBody>
+                    <a:bodyPr/>
+                    <a:lstStyle/>
+                    <a:p>
+                      <a:pPr marL="0" marR="0" algn="l">
+                        <a:buNone/>
+                      </a:pPr>
+                      <a:r>
+                        <a:rPr lang="en-US" b="1" dirty="0">
+                          <a:effectLst/>
+                        </a:rPr>
+                        <a:t>Annotation</a:t>
+                      </a:r>
+                      <a:endParaRPr lang="en-US" b="1" i="0" dirty="0">
+                        <a:solidFill>
+                          <a:srgbClr val="FFFFFF"/>
+                        </a:solidFill>
+                        <a:effectLst/>
+                        <a:latin typeface="-apple-system-body"/>
+                      </a:endParaRPr>
+                    </a:p>
+                  </a:txBody>
+                  <a:tcPr anchor="ctr"/>
+                </a:tc>
+                <a:tc>
+                  <a:txBody>
+                    <a:bodyPr/>
+                    <a:lstStyle/>
+                    <a:p>
+                      <a:pPr marL="0" marR="0" algn="l">
+                        <a:buNone/>
+                      </a:pPr>
+                      <a:r>
+                        <a:rPr lang="en-US" b="1" dirty="0">
+                          <a:effectLst/>
+                        </a:rPr>
+                        <a:t>Runs</a:t>
+                      </a:r>
+                      <a:endParaRPr lang="en-US" b="1" i="0" dirty="0">
+                        <a:solidFill>
+                          <a:srgbClr val="FFFFFF"/>
+                        </a:solidFill>
+                        <a:effectLst/>
+                        <a:latin typeface="-apple-system-body"/>
+                      </a:endParaRPr>
+                    </a:p>
+                  </a:txBody>
+                  <a:tcPr anchor="ctr"/>
+                </a:tc>
+                <a:extLst>
+                  <a:ext uri="{0D108BD9-81ED-4DB2-BD59-A6C34878D82A}">
+                    <a16:rowId xmlns:a16="http://schemas.microsoft.com/office/drawing/2014/main" val="411174062"/>
+                  </a:ext>
+                </a:extLst>
+              </a:tr>
+              <a:tr h="0">
+                <a:tc>
+                  <a:txBody>
+                    <a:bodyPr/>
+                    <a:lstStyle/>
+                    <a:p>
+                      <a:pPr marL="0" marR="0" algn="l">
+                        <a:buNone/>
+                      </a:pPr>
+                      <a:r>
+                        <a:rPr lang="en-US">
+                          <a:effectLst/>
+                        </a:rPr>
+                        <a:t>@BeforeEach</a:t>
+                      </a:r>
+                      <a:endParaRPr lang="en-US" b="0" i="0">
+                        <a:solidFill>
+                          <a:srgbClr val="FFFFFF"/>
+                        </a:solidFill>
+                        <a:effectLst/>
+                        <a:latin typeface="-apple-system-body"/>
+                      </a:endParaRPr>
+                    </a:p>
+                  </a:txBody>
+                  <a:tcPr anchor="ctr"/>
+                </a:tc>
+                <a:tc>
+                  <a:txBody>
+                    <a:bodyPr/>
+                    <a:lstStyle/>
+                    <a:p>
+                      <a:pPr marL="0" marR="0" algn="l">
+                        <a:buNone/>
+                      </a:pPr>
+                      <a:r>
+                        <a:rPr lang="en-US">
+                          <a:effectLst/>
+                        </a:rPr>
+                        <a:t>Before each test</a:t>
+                      </a:r>
+                      <a:endParaRPr lang="en-US" b="0" i="0">
+                        <a:solidFill>
+                          <a:srgbClr val="FFFFFF"/>
+                        </a:solidFill>
+                        <a:effectLst/>
+                        <a:latin typeface="-apple-system-body"/>
+                      </a:endParaRPr>
+                    </a:p>
+                  </a:txBody>
+                  <a:tcPr anchor="ctr"/>
+                </a:tc>
+                <a:extLst>
+                  <a:ext uri="{0D108BD9-81ED-4DB2-BD59-A6C34878D82A}">
+                    <a16:rowId xmlns:a16="http://schemas.microsoft.com/office/drawing/2014/main" val="3923368939"/>
+                  </a:ext>
+                </a:extLst>
+              </a:tr>
+              <a:tr h="0">
+                <a:tc>
+                  <a:txBody>
+                    <a:bodyPr/>
+                    <a:lstStyle/>
+                    <a:p>
+                      <a:pPr marL="0" marR="0" algn="l">
+                        <a:buNone/>
+                      </a:pPr>
+                      <a:r>
+                        <a:rPr lang="en-US">
+                          <a:effectLst/>
+                        </a:rPr>
+                        <a:t>@AfterEach</a:t>
+                      </a:r>
+                      <a:endParaRPr lang="en-US" b="0" i="0">
+                        <a:solidFill>
+                          <a:srgbClr val="FFFFFF"/>
+                        </a:solidFill>
+                        <a:effectLst/>
+                        <a:latin typeface="-apple-system-body"/>
+                      </a:endParaRPr>
+                    </a:p>
+                  </a:txBody>
+                  <a:tcPr anchor="ctr"/>
+                </a:tc>
+                <a:tc>
+                  <a:txBody>
+                    <a:bodyPr/>
+                    <a:lstStyle/>
+                    <a:p>
+                      <a:pPr marL="0" marR="0" algn="l">
+                        <a:buNone/>
+                      </a:pPr>
+                      <a:r>
+                        <a:rPr lang="en-US">
+                          <a:effectLst/>
+                        </a:rPr>
+                        <a:t>After each test</a:t>
+                      </a:r>
+                      <a:endParaRPr lang="en-US" b="0" i="0">
+                        <a:solidFill>
+                          <a:srgbClr val="FFFFFF"/>
+                        </a:solidFill>
+                        <a:effectLst/>
+                        <a:latin typeface="-apple-system-body"/>
+                      </a:endParaRPr>
+                    </a:p>
+                  </a:txBody>
+                  <a:tcPr anchor="ctr"/>
+                </a:tc>
+                <a:extLst>
+                  <a:ext uri="{0D108BD9-81ED-4DB2-BD59-A6C34878D82A}">
+                    <a16:rowId xmlns:a16="http://schemas.microsoft.com/office/drawing/2014/main" val="2439131391"/>
+                  </a:ext>
+                </a:extLst>
+              </a:tr>
+              <a:tr h="0">
+                <a:tc>
+                  <a:txBody>
+                    <a:bodyPr/>
+                    <a:lstStyle/>
+                    <a:p>
+                      <a:pPr marL="0" marR="0" algn="l">
+                        <a:buNone/>
+                      </a:pPr>
+                      <a:r>
+                        <a:rPr lang="en-US">
+                          <a:effectLst/>
+                        </a:rPr>
+                        <a:t>@BeforeAll</a:t>
+                      </a:r>
+                      <a:endParaRPr lang="en-US" b="0" i="0">
+                        <a:solidFill>
+                          <a:srgbClr val="FFFFFF"/>
+                        </a:solidFill>
+                        <a:effectLst/>
+                        <a:latin typeface="-apple-system-body"/>
+                      </a:endParaRPr>
+                    </a:p>
+                  </a:txBody>
+                  <a:tcPr anchor="ctr"/>
+                </a:tc>
+                <a:tc>
+                  <a:txBody>
+                    <a:bodyPr/>
+                    <a:lstStyle/>
+                    <a:p>
+                      <a:pPr marL="0" marR="0" algn="l">
+                        <a:buNone/>
+                      </a:pPr>
+                      <a:r>
+                        <a:rPr lang="en-US">
+                          <a:effectLst/>
+                        </a:rPr>
+                        <a:t>Once before all tests in the class</a:t>
+                      </a:r>
+                      <a:endParaRPr lang="en-US" b="0" i="0">
+                        <a:solidFill>
+                          <a:srgbClr val="FFFFFF"/>
+                        </a:solidFill>
+                        <a:effectLst/>
+                        <a:latin typeface="-apple-system-body"/>
+                      </a:endParaRPr>
+                    </a:p>
+                  </a:txBody>
+                  <a:tcPr anchor="ctr"/>
+                </a:tc>
+                <a:extLst>
+                  <a:ext uri="{0D108BD9-81ED-4DB2-BD59-A6C34878D82A}">
+                    <a16:rowId xmlns:a16="http://schemas.microsoft.com/office/drawing/2014/main" val="1625612288"/>
+                  </a:ext>
+                </a:extLst>
+              </a:tr>
+              <a:tr h="0">
+                <a:tc>
+                  <a:txBody>
+                    <a:bodyPr/>
+                    <a:lstStyle/>
+                    <a:p>
+                      <a:pPr marL="0" marR="0" algn="l">
+                        <a:buNone/>
+                      </a:pPr>
+                      <a:r>
+                        <a:rPr lang="en-US">
+                          <a:effectLst/>
+                        </a:rPr>
+                        <a:t>@AfterAll</a:t>
+                      </a:r>
+                      <a:endParaRPr lang="en-US" b="0" i="0">
+                        <a:solidFill>
+                          <a:srgbClr val="FFFFFF"/>
+                        </a:solidFill>
+                        <a:effectLst/>
+                        <a:latin typeface="-apple-system-body"/>
+                      </a:endParaRPr>
+                    </a:p>
+                  </a:txBody>
+                  <a:tcPr anchor="ctr"/>
+                </a:tc>
+                <a:tc>
+                  <a:txBody>
+                    <a:bodyPr/>
+                    <a:lstStyle/>
+                    <a:p>
+                      <a:pPr marL="0" marR="0" algn="l">
+                        <a:buNone/>
+                      </a:pPr>
+                      <a:r>
+                        <a:rPr lang="en-US" dirty="0">
+                          <a:effectLst/>
+                        </a:rPr>
+                        <a:t>Once after all tests in the class</a:t>
+                      </a:r>
+                      <a:endParaRPr lang="en-US" b="0" i="0" dirty="0">
+                        <a:solidFill>
+                          <a:srgbClr val="FFFFFF"/>
+                        </a:solidFill>
+                        <a:effectLst/>
+                        <a:latin typeface="-apple-system-body"/>
+                      </a:endParaRPr>
+                    </a:p>
+                  </a:txBody>
+                  <a:tcPr anchor="ctr"/>
+                </a:tc>
+                <a:extLst>
+                  <a:ext uri="{0D108BD9-81ED-4DB2-BD59-A6C34878D82A}">
+                    <a16:rowId xmlns:a16="http://schemas.microsoft.com/office/drawing/2014/main" val="2916353712"/>
+                  </a:ext>
+                </a:extLst>
+              </a:tr>
+            </a:tbl>
+          </a:graphicData>
+        </a:graphic>
+      </p:graphicFrame>
+      <p:pic>
+        <p:nvPicPr>
+          <p:cNvPr id="6" name="Picture 5">
+            <a:extLst>
+              <a:ext uri="{FF2B5EF4-FFF2-40B4-BE49-F238E27FC236}">
+                <a16:creationId xmlns:a16="http://schemas.microsoft.com/office/drawing/2014/main" id="{00B2E970-A628-8347-E893-D2666DFDEE1D}"/>
+              </a:ext>
+            </a:extLst>
+          </p:cNvPr>
+          <p:cNvPicPr>
+            <a:picLocks noChangeAspect="1"/>
+          </p:cNvPicPr>
+          <p:nvPr/>
+        </p:nvPicPr>
+        <p:blipFill>
+          <a:blip r:embed="rId2"/>
+          <a:stretch>
+            <a:fillRect/>
+          </a:stretch>
+        </p:blipFill>
+        <p:spPr>
+          <a:xfrm>
+            <a:off x="4123908" y="4452888"/>
+            <a:ext cx="3944184" cy="2097083"/>
+          </a:xfrm>
+          <a:prstGeom prst="rect">
+            <a:avLst/>
+          </a:prstGeom>
+        </p:spPr>
+      </p:pic>
+      <p:sp>
+        <p:nvSpPr>
+          <p:cNvPr id="7" name="TextBox 6">
+            <a:extLst>
+              <a:ext uri="{FF2B5EF4-FFF2-40B4-BE49-F238E27FC236}">
+                <a16:creationId xmlns:a16="http://schemas.microsoft.com/office/drawing/2014/main" id="{0A4A7D67-ED42-94D2-5121-C609A11A08F8}"/>
+              </a:ext>
+            </a:extLst>
+          </p:cNvPr>
+          <p:cNvSpPr txBox="1"/>
+          <p:nvPr/>
+        </p:nvSpPr>
+        <p:spPr>
+          <a:xfrm>
+            <a:off x="8288122" y="4796224"/>
+            <a:ext cx="3547872" cy="1200329"/>
+          </a:xfrm>
+          <a:prstGeom prst="rect">
+            <a:avLst/>
+          </a:prstGeom>
+          <a:noFill/>
+        </p:spPr>
+        <p:txBody>
+          <a:bodyPr wrap="square" rtlCol="0">
+            <a:spAutoFit/>
+          </a:bodyPr>
+          <a:lstStyle/>
+          <a:p>
+            <a:r>
+              <a:rPr lang="en-US" dirty="0"/>
+              <a:t>Oten used in tandem with Mockito to create mocks for each test method. But these lifecycle annotations are part of Junit!</a:t>
+            </a:r>
+          </a:p>
+        </p:txBody>
+      </p:sp>
+    </p:spTree>
+    <p:extLst>
+      <p:ext uri="{BB962C8B-B14F-4D97-AF65-F5344CB8AC3E}">
+        <p14:creationId xmlns:p14="http://schemas.microsoft.com/office/powerpoint/2010/main" val="4066969298"/>
+      </p:ext>
+    </p:extLst>
+  </p:cSld>
+  <p:clrMapOvr>
+    <a:masterClrMapping/>
+  </p:clrMapOvr>
+</p:sld>
+</file>
+
+<file path=ppt/slides/slide12.xml><?xml version="1.0" encoding="utf-8"?>
+<p:sld xmlns:a="http://schemas.openxmlformats.org/drawingml/2006/main" xmlns:r="http://schemas.openxmlformats.org/officeDocument/2006/relationships" xmlns:p="http://schemas.openxmlformats.org/presentationml/2006/main">
+  <p:cSld>
+    <p:spTree>
+      <p:nvGrpSpPr>
+        <p:cNvPr id="1" name=""/>
+        <p:cNvGrpSpPr/>
+        <p:nvPr/>
+      </p:nvGrpSpPr>
+      <p:grpSpPr>
+        <a:xfrm>
+          <a:off x="0" y="0"/>
+          <a:ext cx="0" cy="0"/>
+          <a:chOff x="0" y="0"/>
+          <a:chExt cx="0" cy="0"/>
+        </a:xfrm>
+      </p:grpSpPr>
+      <p:sp>
+        <p:nvSpPr>
+          <p:cNvPr id="2" name="Title 1">
+            <a:extLst>
+              <a:ext uri="{FF2B5EF4-FFF2-40B4-BE49-F238E27FC236}">
+                <a16:creationId xmlns:a16="http://schemas.microsoft.com/office/drawing/2014/main" id="{E89A3632-CFD2-802B-EE2F-BE0E9E8E254E}"/>
+              </a:ext>
+            </a:extLst>
+          </p:cNvPr>
+          <p:cNvSpPr>
+            <a:spLocks noGrp="1"/>
+          </p:cNvSpPr>
+          <p:nvPr>
+            <p:ph type="title"/>
+          </p:nvPr>
+        </p:nvSpPr>
+        <p:spPr/>
+        <p:txBody>
+          <a:bodyPr/>
+          <a:lstStyle/>
+          <a:p>
+            <a:r>
+              <a:rPr lang="en-US" dirty="0"/>
+              <a:t>Mockito – stubs &amp; Mocks</a:t>
+            </a:r>
+          </a:p>
+        </p:txBody>
+      </p:sp>
+      <p:sp>
+        <p:nvSpPr>
+          <p:cNvPr id="3" name="Content Placeholder 2">
+            <a:extLst>
+              <a:ext uri="{FF2B5EF4-FFF2-40B4-BE49-F238E27FC236}">
+                <a16:creationId xmlns:a16="http://schemas.microsoft.com/office/drawing/2014/main" id="{33512DD8-853F-428B-2F41-6436A44307E6}"/>
+              </a:ext>
+            </a:extLst>
+          </p:cNvPr>
+          <p:cNvSpPr>
+            <a:spLocks noGrp="1"/>
+          </p:cNvSpPr>
+          <p:nvPr>
+            <p:ph idx="1"/>
+          </p:nvPr>
+        </p:nvSpPr>
+        <p:spPr>
+          <a:xfrm>
+            <a:off x="581192" y="2180496"/>
+            <a:ext cx="5713137" cy="4038677"/>
+          </a:xfrm>
+        </p:spPr>
+        <p:txBody>
+          <a:bodyPr>
+            <a:normAutofit lnSpcReduction="10000"/>
+          </a:bodyPr>
+          <a:lstStyle/>
+          <a:p>
+            <a:r>
+              <a:rPr lang="en-US" dirty="0"/>
+              <a:t>Stub – provides predefined answers so your test can focus on behavior </a:t>
+            </a:r>
+          </a:p>
+          <a:p>
+            <a:r>
+              <a:rPr lang="en-US" dirty="0"/>
+              <a:t>Mock – lets you verify interactions such as whether a method was called, what it returned, and with what arguments it used</a:t>
+            </a:r>
+          </a:p>
+          <a:p>
+            <a:r>
+              <a:rPr lang="en-US" dirty="0"/>
+              <a:t>Common methods:</a:t>
+            </a:r>
+          </a:p>
+          <a:p>
+            <a:pPr lvl="1"/>
+            <a:r>
+              <a:rPr lang="en-US" dirty="0"/>
+              <a:t>Mock() – creates the mock (as seen on previous slide)</a:t>
+            </a:r>
+          </a:p>
+          <a:p>
+            <a:pPr lvl="1"/>
+            <a:r>
+              <a:rPr lang="en-US" dirty="0"/>
+              <a:t>When() – configures the mock / sets up a stub </a:t>
+            </a:r>
+          </a:p>
+          <a:p>
+            <a:pPr lvl="1"/>
+            <a:r>
+              <a:rPr lang="en-US" dirty="0"/>
+              <a:t>verify() – verifies interactions with the mock (sometimes we only need this and no assertions, sometimes we could use both)</a:t>
+            </a:r>
+          </a:p>
+          <a:p>
+            <a:pPr lvl="2"/>
+            <a:r>
+              <a:rPr lang="en-US" dirty="0"/>
+              <a:t>General rule: use assertions when you care about the result/state. Use verify() when you care about what the code did to a dependency</a:t>
+            </a:r>
+          </a:p>
+        </p:txBody>
+      </p:sp>
+      <p:pic>
+        <p:nvPicPr>
+          <p:cNvPr id="5" name="Picture 4">
+            <a:extLst>
+              <a:ext uri="{FF2B5EF4-FFF2-40B4-BE49-F238E27FC236}">
+                <a16:creationId xmlns:a16="http://schemas.microsoft.com/office/drawing/2014/main" id="{180495AF-122D-5BC5-5EDD-C87C2EA68DB5}"/>
+              </a:ext>
+            </a:extLst>
+          </p:cNvPr>
+          <p:cNvPicPr>
+            <a:picLocks noChangeAspect="1"/>
+          </p:cNvPicPr>
+          <p:nvPr/>
+        </p:nvPicPr>
+        <p:blipFill>
+          <a:blip r:embed="rId2"/>
+          <a:stretch>
+            <a:fillRect/>
+          </a:stretch>
+        </p:blipFill>
+        <p:spPr>
+          <a:xfrm>
+            <a:off x="6386170" y="2557485"/>
+            <a:ext cx="5312391" cy="1350014"/>
+          </a:xfrm>
+          <a:prstGeom prst="rect">
+            <a:avLst/>
+          </a:prstGeom>
+        </p:spPr>
+      </p:pic>
+      <p:pic>
+        <p:nvPicPr>
+          <p:cNvPr id="7" name="Picture 6">
+            <a:extLst>
+              <a:ext uri="{FF2B5EF4-FFF2-40B4-BE49-F238E27FC236}">
+                <a16:creationId xmlns:a16="http://schemas.microsoft.com/office/drawing/2014/main" id="{526FB61F-17FB-29F9-9B3C-D7BCB6C2175E}"/>
+              </a:ext>
+            </a:extLst>
+          </p:cNvPr>
+          <p:cNvPicPr>
+            <a:picLocks noChangeAspect="1"/>
+          </p:cNvPicPr>
+          <p:nvPr/>
+        </p:nvPicPr>
+        <p:blipFill>
+          <a:blip r:embed="rId3"/>
+          <a:stretch>
+            <a:fillRect/>
+          </a:stretch>
+        </p:blipFill>
+        <p:spPr>
+          <a:xfrm>
+            <a:off x="6386170" y="4520454"/>
+            <a:ext cx="5427583" cy="1208816"/>
+          </a:xfrm>
+          <a:prstGeom prst="rect">
+            <a:avLst/>
+          </a:prstGeom>
+        </p:spPr>
+      </p:pic>
+    </p:spTree>
+    <p:extLst>
+      <p:ext uri="{BB962C8B-B14F-4D97-AF65-F5344CB8AC3E}">
+        <p14:creationId xmlns:p14="http://schemas.microsoft.com/office/powerpoint/2010/main" val="3380182710"/>
+      </p:ext>
+    </p:extLst>
+  </p:cSld>
+  <p:clrMapOvr>
+    <a:masterClrMapping/>
+  </p:clrMapOvr>
+</p:sld>
+</file>
+
+<file path=ppt/slides/slide13.xml><?xml version="1.0" encoding="utf-8"?>
+<p:sld xmlns:a="http://schemas.openxmlformats.org/drawingml/2006/main" xmlns:r="http://schemas.openxmlformats.org/officeDocument/2006/relationships" xmlns:p="http://schemas.openxmlformats.org/presentationml/2006/main">
+  <p:cSld>
+    <p:spTree>
+      <p:nvGrpSpPr>
+        <p:cNvPr id="1" name=""/>
+        <p:cNvGrpSpPr/>
+        <p:nvPr/>
+      </p:nvGrpSpPr>
+      <p:grpSpPr>
+        <a:xfrm>
+          <a:off x="0" y="0"/>
+          <a:ext cx="0" cy="0"/>
+          <a:chOff x="0" y="0"/>
+          <a:chExt cx="0" cy="0"/>
+        </a:xfrm>
+      </p:grpSpPr>
+      <p:sp>
+        <p:nvSpPr>
+          <p:cNvPr id="2" name="Title 1">
+            <a:extLst>
+              <a:ext uri="{FF2B5EF4-FFF2-40B4-BE49-F238E27FC236}">
+                <a16:creationId xmlns:a16="http://schemas.microsoft.com/office/drawing/2014/main" id="{87DD4A56-A925-3BE9-723C-2F7B0A6E52A3}"/>
+              </a:ext>
+            </a:extLst>
+          </p:cNvPr>
+          <p:cNvSpPr>
+            <a:spLocks noGrp="1"/>
+          </p:cNvSpPr>
+          <p:nvPr>
+            <p:ph type="title"/>
+          </p:nvPr>
+        </p:nvSpPr>
+        <p:spPr/>
+        <p:txBody>
+          <a:bodyPr/>
+          <a:lstStyle/>
+          <a:p>
+            <a:r>
+              <a:rPr lang="en-US" dirty="0"/>
+              <a:t>Naming tests, project directory placement, &amp; POM config</a:t>
+            </a:r>
+          </a:p>
+        </p:txBody>
+      </p:sp>
+      <p:sp>
+        <p:nvSpPr>
+          <p:cNvPr id="3" name="Content Placeholder 2">
+            <a:extLst>
+              <a:ext uri="{FF2B5EF4-FFF2-40B4-BE49-F238E27FC236}">
+                <a16:creationId xmlns:a16="http://schemas.microsoft.com/office/drawing/2014/main" id="{6AB255F6-110C-56D5-7DD2-0BEE7DB19C1A}"/>
+              </a:ext>
+            </a:extLst>
+          </p:cNvPr>
+          <p:cNvSpPr>
+            <a:spLocks noGrp="1"/>
+          </p:cNvSpPr>
+          <p:nvPr>
+            <p:ph idx="1"/>
+          </p:nvPr>
+        </p:nvSpPr>
+        <p:spPr>
+          <a:xfrm>
+            <a:off x="581192" y="2180496"/>
+            <a:ext cx="11029615" cy="1013801"/>
+          </a:xfrm>
+        </p:spPr>
+        <p:txBody>
+          <a:bodyPr/>
+          <a:lstStyle/>
+          <a:p>
+            <a:r>
+              <a:rPr lang="en-US" dirty="0"/>
+              <a:t>Tests are placed in the directory as shown</a:t>
+            </a:r>
+          </a:p>
+          <a:p>
+            <a:r>
+              <a:rPr lang="en-US" dirty="0"/>
+              <a:t>Test classes are named like: NameOfClassWeAreTestingTest.java</a:t>
+            </a:r>
+          </a:p>
+        </p:txBody>
+      </p:sp>
+      <p:pic>
+        <p:nvPicPr>
+          <p:cNvPr id="7" name="Picture 6">
+            <a:extLst>
+              <a:ext uri="{FF2B5EF4-FFF2-40B4-BE49-F238E27FC236}">
+                <a16:creationId xmlns:a16="http://schemas.microsoft.com/office/drawing/2014/main" id="{9247F92B-EF2B-CB61-5B5B-E6118642C441}"/>
+              </a:ext>
+            </a:extLst>
+          </p:cNvPr>
+          <p:cNvPicPr>
+            <a:picLocks noChangeAspect="1"/>
+          </p:cNvPicPr>
+          <p:nvPr/>
+        </p:nvPicPr>
+        <p:blipFill>
+          <a:blip r:embed="rId2"/>
+          <a:stretch>
+            <a:fillRect/>
+          </a:stretch>
+        </p:blipFill>
+        <p:spPr>
+          <a:xfrm>
+            <a:off x="2365665" y="3325415"/>
+            <a:ext cx="3305636" cy="666843"/>
+          </a:xfrm>
+          <a:prstGeom prst="rect">
+            <a:avLst/>
+          </a:prstGeom>
+        </p:spPr>
+      </p:pic>
+      <p:pic>
+        <p:nvPicPr>
+          <p:cNvPr id="9" name="Picture 8">
+            <a:extLst>
+              <a:ext uri="{FF2B5EF4-FFF2-40B4-BE49-F238E27FC236}">
+                <a16:creationId xmlns:a16="http://schemas.microsoft.com/office/drawing/2014/main" id="{ECF98F21-11BB-C133-36C6-318085BB5EA0}"/>
+              </a:ext>
+            </a:extLst>
+          </p:cNvPr>
+          <p:cNvPicPr>
+            <a:picLocks noChangeAspect="1"/>
+          </p:cNvPicPr>
+          <p:nvPr/>
+        </p:nvPicPr>
+        <p:blipFill>
+          <a:blip r:embed="rId3"/>
+          <a:stretch>
+            <a:fillRect/>
+          </a:stretch>
+        </p:blipFill>
+        <p:spPr>
+          <a:xfrm>
+            <a:off x="8055531" y="2114093"/>
+            <a:ext cx="2966235" cy="4568342"/>
+          </a:xfrm>
+          <a:prstGeom prst="rect">
+            <a:avLst/>
+          </a:prstGeom>
+        </p:spPr>
+      </p:pic>
+      <p:sp>
+        <p:nvSpPr>
+          <p:cNvPr id="11" name="TextBox 10">
+            <a:extLst>
+              <a:ext uri="{FF2B5EF4-FFF2-40B4-BE49-F238E27FC236}">
+                <a16:creationId xmlns:a16="http://schemas.microsoft.com/office/drawing/2014/main" id="{4A81CA89-3092-C76D-1A7A-76DEA85EA8DE}"/>
+              </a:ext>
+            </a:extLst>
+          </p:cNvPr>
+          <p:cNvSpPr txBox="1"/>
+          <p:nvPr/>
+        </p:nvSpPr>
+        <p:spPr>
+          <a:xfrm>
+            <a:off x="581192" y="4942728"/>
+            <a:ext cx="6097218" cy="923330"/>
+          </a:xfrm>
+          <a:prstGeom prst="rect">
+            <a:avLst/>
+          </a:prstGeom>
+          <a:noFill/>
+        </p:spPr>
+        <p:txBody>
+          <a:bodyPr wrap="square">
+            <a:spAutoFit/>
+          </a:bodyPr>
+          <a:lstStyle/>
+          <a:p>
+            <a:pPr marL="285750" indent="-285750">
+              <a:buClr>
+                <a:schemeClr val="accent2"/>
+              </a:buClr>
+              <a:buFont typeface="Wingdings" panose="05000000000000000000" pitchFamily="2" charset="2"/>
+              <a:buChar char="§"/>
+            </a:pPr>
+            <a:r>
+              <a:rPr lang="en-US" dirty="0"/>
+              <a:t>We must also add dependencies and plugin configuration to our Maven pom file, a complete solution is included in your course materials</a:t>
+            </a:r>
+            <a:endParaRPr lang="en-US" sz="1800" dirty="0"/>
+          </a:p>
+        </p:txBody>
+      </p:sp>
+    </p:spTree>
+    <p:extLst>
+      <p:ext uri="{BB962C8B-B14F-4D97-AF65-F5344CB8AC3E}">
+        <p14:creationId xmlns:p14="http://schemas.microsoft.com/office/powerpoint/2010/main" val="2923257438"/>
+      </p:ext>
+    </p:extLst>
+  </p:cSld>
+  <p:clrMapOvr>
+    <a:masterClrMapping/>
+  </p:clrMapOvr>
+</p:sld>
+</file>
+
+<file path=ppt/slides/slide14.xml><?xml version="1.0" encoding="utf-8"?>
+<p:sld xmlns:a="http://schemas.openxmlformats.org/drawingml/2006/main" xmlns:r="http://schemas.openxmlformats.org/officeDocument/2006/relationships" xmlns:p="http://schemas.openxmlformats.org/presentationml/2006/main">
+  <p:cSld>
+    <p:spTree>
+      <p:nvGrpSpPr>
+        <p:cNvPr id="1" name=""/>
+        <p:cNvGrpSpPr/>
+        <p:nvPr/>
+      </p:nvGrpSpPr>
+      <p:grpSpPr>
+        <a:xfrm>
+          <a:off x="0" y="0"/>
+          <a:ext cx="0" cy="0"/>
+          <a:chOff x="0" y="0"/>
+          <a:chExt cx="0" cy="0"/>
+        </a:xfrm>
+      </p:grpSpPr>
+      <p:sp>
+        <p:nvSpPr>
+          <p:cNvPr id="2" name="Title 1">
+            <a:extLst>
+              <a:ext uri="{FF2B5EF4-FFF2-40B4-BE49-F238E27FC236}">
+                <a16:creationId xmlns:a16="http://schemas.microsoft.com/office/drawing/2014/main" id="{099EFADC-0B4A-0F3C-C908-3BFD756E3510}"/>
+              </a:ext>
+            </a:extLst>
+          </p:cNvPr>
+          <p:cNvSpPr>
+            <a:spLocks noGrp="1"/>
+          </p:cNvSpPr>
+          <p:nvPr>
+            <p:ph type="title"/>
+          </p:nvPr>
+        </p:nvSpPr>
+        <p:spPr/>
+        <p:txBody>
+          <a:bodyPr/>
+          <a:lstStyle/>
+          <a:p>
+            <a:r>
+              <a:rPr lang="en-US" dirty="0"/>
+              <a:t>Testing best practices</a:t>
+            </a:r>
+          </a:p>
+        </p:txBody>
+      </p:sp>
+      <p:sp>
+        <p:nvSpPr>
+          <p:cNvPr id="3" name="Content Placeholder 2">
+            <a:extLst>
+              <a:ext uri="{FF2B5EF4-FFF2-40B4-BE49-F238E27FC236}">
+                <a16:creationId xmlns:a16="http://schemas.microsoft.com/office/drawing/2014/main" id="{1EA587C7-6124-080E-D8DA-5D6353C80F64}"/>
+              </a:ext>
+            </a:extLst>
+          </p:cNvPr>
+          <p:cNvSpPr>
+            <a:spLocks noGrp="1"/>
+          </p:cNvSpPr>
+          <p:nvPr>
+            <p:ph idx="1"/>
+          </p:nvPr>
+        </p:nvSpPr>
+        <p:spPr/>
+        <p:txBody>
+          <a:bodyPr/>
+          <a:lstStyle/>
+          <a:p>
+            <a:r>
+              <a:rPr lang="en-US" dirty="0"/>
+              <a:t>To ensure we write tests that are logically sound, consider the following different types of unit tests (non-exhaustive, this is just how your trainer likes to think about it):</a:t>
+            </a:r>
+          </a:p>
+          <a:p>
+            <a:pPr lvl="1"/>
+            <a:r>
+              <a:rPr lang="en-US" dirty="0"/>
+              <a:t>Positive: verifies code works when given valid inputs</a:t>
+            </a:r>
+          </a:p>
+          <a:p>
+            <a:pPr lvl="1"/>
+            <a:r>
+              <a:rPr lang="en-US" dirty="0"/>
+              <a:t>Negative: verifies the code works as expected with invalid inputs</a:t>
+            </a:r>
+          </a:p>
+          <a:p>
+            <a:pPr lvl="1"/>
+            <a:r>
+              <a:rPr lang="en-US" dirty="0"/>
+              <a:t>Bulk: verifies the code works when CRUD is performed on many records</a:t>
+            </a:r>
+          </a:p>
+          <a:p>
+            <a:pPr lvl="1"/>
+            <a:r>
+              <a:rPr lang="en-US" dirty="0"/>
+              <a:t>Single: verifies the code works when CRUD is performed on a single record</a:t>
+            </a:r>
+          </a:p>
+          <a:p>
+            <a:pPr lvl="1"/>
+            <a:r>
+              <a:rPr lang="en-US" dirty="0"/>
+              <a:t>Access Control (positive/negative):  verifies users do or do not have expected access to perform an action </a:t>
+            </a:r>
+          </a:p>
+        </p:txBody>
+      </p:sp>
+    </p:spTree>
+    <p:extLst>
+      <p:ext uri="{BB962C8B-B14F-4D97-AF65-F5344CB8AC3E}">
+        <p14:creationId xmlns:p14="http://schemas.microsoft.com/office/powerpoint/2010/main" val="1054323851"/>
+      </p:ext>
+    </p:extLst>
+  </p:cSld>
+  <p:clrMapOvr>
+    <a:masterClrMapping/>
+  </p:clrMapOvr>
+</p:sld>
+</file>
+
+<file path=ppt/slides/slide15.xml><?xml version="1.0" encoding="utf-8"?>
+<p:sld xmlns:a="http://schemas.openxmlformats.org/drawingml/2006/main" xmlns:r="http://schemas.openxmlformats.org/officeDocument/2006/relationships" xmlns:p="http://schemas.openxmlformats.org/presentationml/2006/main">
+  <p:cSld>
+    <p:spTree>
+      <p:nvGrpSpPr>
+        <p:cNvPr id="1" name=""/>
+        <p:cNvGrpSpPr/>
+        <p:nvPr/>
+      </p:nvGrpSpPr>
+      <p:grpSpPr>
+        <a:xfrm>
+          <a:off x="0" y="0"/>
+          <a:ext cx="0" cy="0"/>
+          <a:chOff x="0" y="0"/>
+          <a:chExt cx="0" cy="0"/>
+        </a:xfrm>
+      </p:grpSpPr>
+      <p:sp>
+        <p:nvSpPr>
+          <p:cNvPr id="2" name="Title 1">
+            <a:extLst>
+              <a:ext uri="{FF2B5EF4-FFF2-40B4-BE49-F238E27FC236}">
+                <a16:creationId xmlns:a16="http://schemas.microsoft.com/office/drawing/2014/main" id="{8668E74F-0E54-3201-F41E-0B8FB21DCEAD}"/>
+              </a:ext>
+            </a:extLst>
+          </p:cNvPr>
+          <p:cNvSpPr>
+            <a:spLocks noGrp="1"/>
+          </p:cNvSpPr>
+          <p:nvPr>
+            <p:ph type="title"/>
+          </p:nvPr>
+        </p:nvSpPr>
+        <p:spPr/>
+        <p:txBody>
+          <a:bodyPr/>
+          <a:lstStyle/>
+          <a:p>
+            <a:r>
+              <a:rPr lang="en-US" dirty="0"/>
+              <a:t>STOP</a:t>
+            </a:r>
+          </a:p>
+        </p:txBody>
+      </p:sp>
+      <p:sp>
+        <p:nvSpPr>
+          <p:cNvPr id="3" name="Content Placeholder 2">
+            <a:extLst>
+              <a:ext uri="{FF2B5EF4-FFF2-40B4-BE49-F238E27FC236}">
+                <a16:creationId xmlns:a16="http://schemas.microsoft.com/office/drawing/2014/main" id="{AFC0D3D5-6C35-5684-ACF7-C06E332BA958}"/>
+              </a:ext>
+            </a:extLst>
+          </p:cNvPr>
+          <p:cNvSpPr>
+            <a:spLocks noGrp="1"/>
+          </p:cNvSpPr>
+          <p:nvPr>
+            <p:ph idx="1"/>
+          </p:nvPr>
+        </p:nvSpPr>
+        <p:spPr/>
+        <p:txBody>
+          <a:bodyPr/>
+          <a:lstStyle/>
+          <a:p>
+            <a:r>
+              <a:rPr lang="en-US" dirty="0"/>
+              <a:t>Please see the ‘</a:t>
+            </a:r>
+            <a:r>
+              <a:rPr lang="en-US" dirty="0" err="1"/>
+              <a:t>cleancodeWithJDBC</a:t>
+            </a:r>
+            <a:r>
+              <a:rPr lang="en-US" dirty="0"/>
+              <a:t>’ project in your course materials</a:t>
+            </a:r>
+          </a:p>
+          <a:p>
+            <a:r>
+              <a:rPr lang="en-US" dirty="0"/>
+              <a:t>This showcases Junit &amp; Mockito concepts</a:t>
+            </a:r>
+          </a:p>
+        </p:txBody>
+      </p:sp>
+    </p:spTree>
+    <p:extLst>
+      <p:ext uri="{BB962C8B-B14F-4D97-AF65-F5344CB8AC3E}">
+        <p14:creationId xmlns:p14="http://schemas.microsoft.com/office/powerpoint/2010/main" val="2727604622"/>
+      </p:ext>
+    </p:extLst>
+  </p:cSld>
+  <p:clrMapOvr>
+    <a:masterClrMapping/>
+  </p:clrMapOvr>
+</p:sld>
+</file>
+
+<file path=ppt/slides/slide16.xml><?xml version="1.0" encoding="utf-8"?>
 <p:sld xmlns:a="http://schemas.openxmlformats.org/drawingml/2006/main" xmlns:r="http://schemas.openxmlformats.org/officeDocument/2006/relationships" xmlns:p="http://schemas.openxmlformats.org/presentationml/2006/main" show="0">
   <p:cSld>
     <p:spTree>
@@ -4452,6 +5550,2399 @@
     <p:extLst>
       <p:ext uri="{BB962C8B-B14F-4D97-AF65-F5344CB8AC3E}">
         <p14:creationId xmlns:p14="http://schemas.microsoft.com/office/powerpoint/2010/main" val="3587871389"/>
+      </p:ext>
+    </p:extLst>
+  </p:cSld>
+  <p:clrMapOvr>
+    <a:masterClrMapping/>
+  </p:clrMapOvr>
+</p:sld>
+</file>
+
+<file path=ppt/slides/slide2.xml><?xml version="1.0" encoding="utf-8"?>
+<p:sld xmlns:a="http://schemas.openxmlformats.org/drawingml/2006/main" xmlns:r="http://schemas.openxmlformats.org/officeDocument/2006/relationships" xmlns:p="http://schemas.openxmlformats.org/presentationml/2006/main">
+  <p:cSld>
+    <p:spTree>
+      <p:nvGrpSpPr>
+        <p:cNvPr id="1" name=""/>
+        <p:cNvGrpSpPr/>
+        <p:nvPr/>
+      </p:nvGrpSpPr>
+      <p:grpSpPr>
+        <a:xfrm>
+          <a:off x="0" y="0"/>
+          <a:ext cx="0" cy="0"/>
+          <a:chOff x="0" y="0"/>
+          <a:chExt cx="0" cy="0"/>
+        </a:xfrm>
+      </p:grpSpPr>
+      <p:sp>
+        <p:nvSpPr>
+          <p:cNvPr id="2" name="Title 1">
+            <a:extLst>
+              <a:ext uri="{FF2B5EF4-FFF2-40B4-BE49-F238E27FC236}">
+                <a16:creationId xmlns:a16="http://schemas.microsoft.com/office/drawing/2014/main" id="{4857AA5D-C488-43A5-3D64-B1D6D0512005}"/>
+              </a:ext>
+            </a:extLst>
+          </p:cNvPr>
+          <p:cNvSpPr>
+            <a:spLocks noGrp="1"/>
+          </p:cNvSpPr>
+          <p:nvPr>
+            <p:ph type="title"/>
+          </p:nvPr>
+        </p:nvSpPr>
+        <p:spPr/>
+        <p:txBody>
+          <a:bodyPr/>
+          <a:lstStyle/>
+          <a:p>
+            <a:r>
+              <a:rPr lang="en-US" dirty="0"/>
+              <a:t>Unit Testing</a:t>
+            </a:r>
+          </a:p>
+        </p:txBody>
+      </p:sp>
+      <p:sp>
+        <p:nvSpPr>
+          <p:cNvPr id="3" name="Content Placeholder 2">
+            <a:extLst>
+              <a:ext uri="{FF2B5EF4-FFF2-40B4-BE49-F238E27FC236}">
+                <a16:creationId xmlns:a16="http://schemas.microsoft.com/office/drawing/2014/main" id="{453E4FDB-A8F2-71B7-3D5E-5E3B4C62CE16}"/>
+              </a:ext>
+            </a:extLst>
+          </p:cNvPr>
+          <p:cNvSpPr>
+            <a:spLocks noGrp="1"/>
+          </p:cNvSpPr>
+          <p:nvPr>
+            <p:ph idx="1"/>
+          </p:nvPr>
+        </p:nvSpPr>
+        <p:spPr/>
+        <p:txBody>
+          <a:bodyPr/>
+          <a:lstStyle/>
+          <a:p>
+            <a:r>
+              <a:rPr lang="en-US" dirty="0"/>
+              <a:t>Unit testing is the practice of testing a small, isolated piece of software</a:t>
+            </a:r>
+          </a:p>
+          <a:p>
+            <a:pPr lvl="1"/>
+            <a:r>
+              <a:rPr lang="en-US" dirty="0"/>
+              <a:t>Isolation – dependencies are often replaced with mocks to only test the method/class itself. i.e. test a service &amp; mock the repo/DAO it uses</a:t>
+            </a:r>
+          </a:p>
+          <a:p>
+            <a:pPr lvl="1"/>
+            <a:r>
+              <a:rPr lang="en-US" dirty="0"/>
+              <a:t>Automation – tests can be run repeatedly and automatically, such as when build the project or deploy </a:t>
+            </a:r>
+          </a:p>
+          <a:p>
+            <a:pPr lvl="1"/>
+            <a:r>
+              <a:rPr lang="en-US" dirty="0"/>
+              <a:t>Fast feedback – since unit tests are small, they run quickly, allowing us to get fast feedback after code changes</a:t>
+            </a:r>
+          </a:p>
+        </p:txBody>
+      </p:sp>
+    </p:spTree>
+    <p:extLst>
+      <p:ext uri="{BB962C8B-B14F-4D97-AF65-F5344CB8AC3E}">
+        <p14:creationId xmlns:p14="http://schemas.microsoft.com/office/powerpoint/2010/main" val="1270905194"/>
+      </p:ext>
+    </p:extLst>
+  </p:cSld>
+  <p:clrMapOvr>
+    <a:masterClrMapping/>
+  </p:clrMapOvr>
+</p:sld>
+</file>
+
+<file path=ppt/slides/slide3.xml><?xml version="1.0" encoding="utf-8"?>
+<p:sld xmlns:a="http://schemas.openxmlformats.org/drawingml/2006/main" xmlns:r="http://schemas.openxmlformats.org/officeDocument/2006/relationships" xmlns:p="http://schemas.openxmlformats.org/presentationml/2006/main">
+  <p:cSld>
+    <p:spTree>
+      <p:nvGrpSpPr>
+        <p:cNvPr id="1" name=""/>
+        <p:cNvGrpSpPr/>
+        <p:nvPr/>
+      </p:nvGrpSpPr>
+      <p:grpSpPr>
+        <a:xfrm>
+          <a:off x="0" y="0"/>
+          <a:ext cx="0" cy="0"/>
+          <a:chOff x="0" y="0"/>
+          <a:chExt cx="0" cy="0"/>
+        </a:xfrm>
+      </p:grpSpPr>
+      <p:sp>
+        <p:nvSpPr>
+          <p:cNvPr id="2" name="Title 1">
+            <a:extLst>
+              <a:ext uri="{FF2B5EF4-FFF2-40B4-BE49-F238E27FC236}">
+                <a16:creationId xmlns:a16="http://schemas.microsoft.com/office/drawing/2014/main" id="{D5701B82-B4A6-FC26-4EDE-8E65DAC17F96}"/>
+              </a:ext>
+            </a:extLst>
+          </p:cNvPr>
+          <p:cNvSpPr>
+            <a:spLocks noGrp="1"/>
+          </p:cNvSpPr>
+          <p:nvPr>
+            <p:ph type="title"/>
+          </p:nvPr>
+        </p:nvSpPr>
+        <p:spPr/>
+        <p:txBody>
+          <a:bodyPr/>
+          <a:lstStyle/>
+          <a:p>
+            <a:r>
+              <a:rPr lang="en-US" dirty="0"/>
+              <a:t>Test example</a:t>
+            </a:r>
+          </a:p>
+        </p:txBody>
+      </p:sp>
+      <p:sp>
+        <p:nvSpPr>
+          <p:cNvPr id="5" name="TextBox 4">
+            <a:extLst>
+              <a:ext uri="{FF2B5EF4-FFF2-40B4-BE49-F238E27FC236}">
+                <a16:creationId xmlns:a16="http://schemas.microsoft.com/office/drawing/2014/main" id="{7DDCC47C-649D-C77F-76C4-34623E7EF949}"/>
+              </a:ext>
+            </a:extLst>
+          </p:cNvPr>
+          <p:cNvSpPr txBox="1"/>
+          <p:nvPr/>
+        </p:nvSpPr>
+        <p:spPr>
+          <a:xfrm>
+            <a:off x="1457717" y="3517054"/>
+            <a:ext cx="3552694" cy="1477328"/>
+          </a:xfrm>
+          <a:prstGeom prst="rect">
+            <a:avLst/>
+          </a:prstGeom>
+          <a:noFill/>
+        </p:spPr>
+        <p:txBody>
+          <a:bodyPr wrap="square">
+            <a:spAutoFit/>
+          </a:bodyPr>
+          <a:lstStyle/>
+          <a:p>
+            <a:r>
+              <a:rPr lang="en-US" dirty="0"/>
+              <a:t>public class Calculator {</a:t>
+            </a:r>
+          </a:p>
+          <a:p>
+            <a:r>
+              <a:rPr lang="en-US" dirty="0"/>
+              <a:t>    public int add(int a, int b) {</a:t>
+            </a:r>
+          </a:p>
+          <a:p>
+            <a:r>
+              <a:rPr lang="en-US" dirty="0"/>
+              <a:t>        return a + b;</a:t>
+            </a:r>
+          </a:p>
+          <a:p>
+            <a:r>
+              <a:rPr lang="en-US" dirty="0"/>
+              <a:t>    }</a:t>
+            </a:r>
+          </a:p>
+          <a:p>
+            <a:r>
+              <a:rPr lang="en-US" dirty="0"/>
+              <a:t>}</a:t>
+            </a:r>
+          </a:p>
+        </p:txBody>
+      </p:sp>
+      <p:sp>
+        <p:nvSpPr>
+          <p:cNvPr id="6" name="TextBox 5">
+            <a:extLst>
+              <a:ext uri="{FF2B5EF4-FFF2-40B4-BE49-F238E27FC236}">
+                <a16:creationId xmlns:a16="http://schemas.microsoft.com/office/drawing/2014/main" id="{1B62284E-4968-8FE3-2808-99CFBF0531BA}"/>
+              </a:ext>
+            </a:extLst>
+          </p:cNvPr>
+          <p:cNvSpPr txBox="1"/>
+          <p:nvPr/>
+        </p:nvSpPr>
+        <p:spPr>
+          <a:xfrm>
+            <a:off x="5217090" y="2298526"/>
+            <a:ext cx="5472717" cy="4247317"/>
+          </a:xfrm>
+          <a:prstGeom prst="rect">
+            <a:avLst/>
+          </a:prstGeom>
+          <a:noFill/>
+        </p:spPr>
+        <p:txBody>
+          <a:bodyPr wrap="none" rtlCol="0">
+            <a:spAutoFit/>
+          </a:bodyPr>
+          <a:lstStyle/>
+          <a:p>
+            <a:r>
+              <a:rPr lang="en-US" dirty="0"/>
+              <a:t>import static </a:t>
+            </a:r>
+            <a:r>
+              <a:rPr lang="en-US" dirty="0" err="1"/>
+              <a:t>org.junit.jupiter.api.Assertions.assertEquals</a:t>
+            </a:r>
+            <a:r>
+              <a:rPr lang="en-US" dirty="0"/>
+              <a:t>;</a:t>
+            </a:r>
+          </a:p>
+          <a:p>
+            <a:r>
+              <a:rPr lang="en-US" dirty="0"/>
+              <a:t>import </a:t>
+            </a:r>
+            <a:r>
+              <a:rPr lang="en-US" dirty="0" err="1"/>
+              <a:t>org.junit.jupiter.api.Test</a:t>
+            </a:r>
+            <a:r>
+              <a:rPr lang="en-US" dirty="0"/>
+              <a:t>;</a:t>
+            </a:r>
+          </a:p>
+          <a:p>
+            <a:endParaRPr lang="en-US" dirty="0"/>
+          </a:p>
+          <a:p>
+            <a:r>
+              <a:rPr lang="en-US" dirty="0"/>
+              <a:t>class </a:t>
+            </a:r>
+            <a:r>
+              <a:rPr lang="en-US" dirty="0" err="1"/>
+              <a:t>CalculatorTest</a:t>
+            </a:r>
+            <a:r>
+              <a:rPr lang="en-US" dirty="0"/>
+              <a:t> {</a:t>
+            </a:r>
+          </a:p>
+          <a:p>
+            <a:endParaRPr lang="en-US" dirty="0"/>
+          </a:p>
+          <a:p>
+            <a:r>
+              <a:rPr lang="en-US" dirty="0"/>
+              <a:t>    @Test</a:t>
+            </a:r>
+          </a:p>
+          <a:p>
+            <a:r>
+              <a:rPr lang="en-US" dirty="0"/>
+              <a:t>    void </a:t>
+            </a:r>
+            <a:r>
+              <a:rPr lang="en-US" dirty="0" err="1"/>
+              <a:t>add_shouldReturnSum</a:t>
+            </a:r>
+            <a:r>
+              <a:rPr lang="en-US" dirty="0"/>
+              <a:t>() {</a:t>
+            </a:r>
+          </a:p>
+          <a:p>
+            <a:r>
+              <a:rPr lang="en-US" dirty="0"/>
+              <a:t>        Calculator </a:t>
+            </a:r>
+            <a:r>
+              <a:rPr lang="en-US" dirty="0" err="1"/>
+              <a:t>calculator</a:t>
+            </a:r>
+            <a:r>
+              <a:rPr lang="en-US" dirty="0"/>
+              <a:t> = new Calculator();</a:t>
+            </a:r>
+          </a:p>
+          <a:p>
+            <a:endParaRPr lang="en-US" dirty="0"/>
+          </a:p>
+          <a:p>
+            <a:r>
+              <a:rPr lang="en-US" dirty="0"/>
+              <a:t>        int result = </a:t>
+            </a:r>
+            <a:r>
+              <a:rPr lang="en-US" dirty="0" err="1"/>
+              <a:t>calculator.add</a:t>
+            </a:r>
+            <a:r>
+              <a:rPr lang="en-US" dirty="0"/>
+              <a:t>(2, 3);</a:t>
+            </a:r>
+          </a:p>
+          <a:p>
+            <a:endParaRPr lang="en-US" dirty="0"/>
+          </a:p>
+          <a:p>
+            <a:r>
+              <a:rPr lang="en-US" dirty="0"/>
+              <a:t>        </a:t>
+            </a:r>
+            <a:r>
+              <a:rPr lang="en-US" dirty="0" err="1"/>
+              <a:t>assertEquals</a:t>
+            </a:r>
+            <a:r>
+              <a:rPr lang="en-US" dirty="0"/>
+              <a:t>(5, result);</a:t>
+            </a:r>
+          </a:p>
+          <a:p>
+            <a:r>
+              <a:rPr lang="en-US" dirty="0"/>
+              <a:t>    }</a:t>
+            </a:r>
+          </a:p>
+          <a:p>
+            <a:r>
+              <a:rPr lang="en-US" dirty="0"/>
+              <a:t>}</a:t>
+            </a:r>
+          </a:p>
+          <a:p>
+            <a:endParaRPr lang="en-US" dirty="0"/>
+          </a:p>
+        </p:txBody>
+      </p:sp>
+    </p:spTree>
+    <p:extLst>
+      <p:ext uri="{BB962C8B-B14F-4D97-AF65-F5344CB8AC3E}">
+        <p14:creationId xmlns:p14="http://schemas.microsoft.com/office/powerpoint/2010/main" val="1582610564"/>
+      </p:ext>
+    </p:extLst>
+  </p:cSld>
+  <p:clrMapOvr>
+    <a:masterClrMapping/>
+  </p:clrMapOvr>
+</p:sld>
+</file>
+
+<file path=ppt/slides/slide4.xml><?xml version="1.0" encoding="utf-8"?>
+<p:sld xmlns:a="http://schemas.openxmlformats.org/drawingml/2006/main" xmlns:r="http://schemas.openxmlformats.org/officeDocument/2006/relationships" xmlns:p="http://schemas.openxmlformats.org/presentationml/2006/main">
+  <p:cSld>
+    <p:spTree>
+      <p:nvGrpSpPr>
+        <p:cNvPr id="1" name=""/>
+        <p:cNvGrpSpPr/>
+        <p:nvPr/>
+      </p:nvGrpSpPr>
+      <p:grpSpPr>
+        <a:xfrm>
+          <a:off x="0" y="0"/>
+          <a:ext cx="0" cy="0"/>
+          <a:chOff x="0" y="0"/>
+          <a:chExt cx="0" cy="0"/>
+        </a:xfrm>
+      </p:grpSpPr>
+      <p:sp>
+        <p:nvSpPr>
+          <p:cNvPr id="2" name="Title 1">
+            <a:extLst>
+              <a:ext uri="{FF2B5EF4-FFF2-40B4-BE49-F238E27FC236}">
+                <a16:creationId xmlns:a16="http://schemas.microsoft.com/office/drawing/2014/main" id="{D14E558C-2FB9-952E-7535-F732D1160E5D}"/>
+              </a:ext>
+            </a:extLst>
+          </p:cNvPr>
+          <p:cNvSpPr>
+            <a:spLocks noGrp="1"/>
+          </p:cNvSpPr>
+          <p:nvPr>
+            <p:ph type="title"/>
+          </p:nvPr>
+        </p:nvSpPr>
+        <p:spPr/>
+        <p:txBody>
+          <a:bodyPr/>
+          <a:lstStyle/>
+          <a:p>
+            <a:r>
+              <a:rPr lang="en-US" dirty="0"/>
+              <a:t>Types of tests</a:t>
+            </a:r>
+          </a:p>
+        </p:txBody>
+      </p:sp>
+      <p:graphicFrame>
+        <p:nvGraphicFramePr>
+          <p:cNvPr id="4" name="Table 3">
+            <a:extLst>
+              <a:ext uri="{FF2B5EF4-FFF2-40B4-BE49-F238E27FC236}">
+                <a16:creationId xmlns:a16="http://schemas.microsoft.com/office/drawing/2014/main" id="{0A353AE7-3765-1A91-25AA-0437C24B06F8}"/>
+              </a:ext>
+            </a:extLst>
+          </p:cNvPr>
+          <p:cNvGraphicFramePr>
+            <a:graphicFrameLocks noGrp="1"/>
+          </p:cNvGraphicFramePr>
+          <p:nvPr>
+            <p:extLst>
+              <p:ext uri="{D42A27DB-BD31-4B8C-83A1-F6EECF244321}">
+                <p14:modId xmlns:p14="http://schemas.microsoft.com/office/powerpoint/2010/main" val="3605458952"/>
+              </p:ext>
+            </p:extLst>
+          </p:nvPr>
+        </p:nvGraphicFramePr>
+        <p:xfrm>
+          <a:off x="581026" y="2634298"/>
+          <a:ext cx="11029948" cy="2926080"/>
+        </p:xfrm>
+        <a:graphic>
+          <a:graphicData uri="http://schemas.openxmlformats.org/drawingml/2006/table">
+            <a:tbl>
+              <a:tblPr>
+                <a:tableStyleId>{5C22544A-7EE6-4342-B048-85BDC9FD1C3A}</a:tableStyleId>
+              </a:tblPr>
+              <a:tblGrid>
+                <a:gridCol w="2757487">
+                  <a:extLst>
+                    <a:ext uri="{9D8B030D-6E8A-4147-A177-3AD203B41FA5}">
+                      <a16:colId xmlns:a16="http://schemas.microsoft.com/office/drawing/2014/main" val="783956790"/>
+                    </a:ext>
+                  </a:extLst>
+                </a:gridCol>
+                <a:gridCol w="2757487">
+                  <a:extLst>
+                    <a:ext uri="{9D8B030D-6E8A-4147-A177-3AD203B41FA5}">
+                      <a16:colId xmlns:a16="http://schemas.microsoft.com/office/drawing/2014/main" val="428826324"/>
+                    </a:ext>
+                  </a:extLst>
+                </a:gridCol>
+                <a:gridCol w="2757487">
+                  <a:extLst>
+                    <a:ext uri="{9D8B030D-6E8A-4147-A177-3AD203B41FA5}">
+                      <a16:colId xmlns:a16="http://schemas.microsoft.com/office/drawing/2014/main" val="1044295255"/>
+                    </a:ext>
+                  </a:extLst>
+                </a:gridCol>
+                <a:gridCol w="2757487">
+                  <a:extLst>
+                    <a:ext uri="{9D8B030D-6E8A-4147-A177-3AD203B41FA5}">
+                      <a16:colId xmlns:a16="http://schemas.microsoft.com/office/drawing/2014/main" val="1781131599"/>
+                    </a:ext>
+                  </a:extLst>
+                </a:gridCol>
+              </a:tblGrid>
+              <a:tr h="365760">
+                <a:tc>
+                  <a:txBody>
+                    <a:bodyPr/>
+                    <a:lstStyle/>
+                    <a:p>
+                      <a:pPr marL="0" marR="0" algn="l">
+                        <a:buNone/>
+                      </a:pPr>
+                      <a:r>
+                        <a:rPr lang="en-US" sz="1800" b="1" dirty="0">
+                          <a:effectLst/>
+                        </a:rPr>
+                        <a:t>Test type</a:t>
+                      </a:r>
+                      <a:endParaRPr lang="en-US" sz="1800" b="1" i="0" dirty="0">
+                        <a:solidFill>
+                          <a:srgbClr val="FFFFFF"/>
+                        </a:solidFill>
+                        <a:effectLst/>
+                        <a:latin typeface="-apple-system-body"/>
+                      </a:endParaRPr>
+                    </a:p>
+                  </a:txBody>
+                  <a:tcPr anchor="ctr"/>
+                </a:tc>
+                <a:tc>
+                  <a:txBody>
+                    <a:bodyPr/>
+                    <a:lstStyle/>
+                    <a:p>
+                      <a:pPr marL="0" marR="0" algn="l">
+                        <a:buNone/>
+                      </a:pPr>
+                      <a:r>
+                        <a:rPr lang="en-US" sz="1800" b="1" dirty="0">
+                          <a:effectLst/>
+                        </a:rPr>
+                        <a:t>What it tests</a:t>
+                      </a:r>
+                      <a:endParaRPr lang="en-US" sz="1800" b="1" i="0" dirty="0">
+                        <a:solidFill>
+                          <a:srgbClr val="FFFFFF"/>
+                        </a:solidFill>
+                        <a:effectLst/>
+                        <a:latin typeface="-apple-system-body"/>
+                      </a:endParaRPr>
+                    </a:p>
+                  </a:txBody>
+                  <a:tcPr anchor="ctr"/>
+                </a:tc>
+                <a:tc>
+                  <a:txBody>
+                    <a:bodyPr/>
+                    <a:lstStyle/>
+                    <a:p>
+                      <a:pPr marL="0" marR="0" algn="r">
+                        <a:buNone/>
+                      </a:pPr>
+                      <a:r>
+                        <a:rPr lang="en-US" sz="1800" b="1">
+                          <a:effectLst/>
+                        </a:rPr>
+                        <a:t>Typical speed</a:t>
+                      </a:r>
+                      <a:endParaRPr lang="en-US" sz="1800" b="1" i="0">
+                        <a:solidFill>
+                          <a:srgbClr val="FFFFFF"/>
+                        </a:solidFill>
+                        <a:effectLst/>
+                        <a:latin typeface="-apple-system-body"/>
+                      </a:endParaRPr>
+                    </a:p>
+                  </a:txBody>
+                  <a:tcPr anchor="ctr"/>
+                </a:tc>
+                <a:tc>
+                  <a:txBody>
+                    <a:bodyPr/>
+                    <a:lstStyle/>
+                    <a:p>
+                      <a:pPr marL="0" marR="0" algn="l">
+                        <a:buNone/>
+                      </a:pPr>
+                      <a:r>
+                        <a:rPr lang="en-US" sz="1800" b="1" dirty="0">
+                          <a:effectLst/>
+                        </a:rPr>
+                        <a:t>Example</a:t>
+                      </a:r>
+                      <a:endParaRPr lang="en-US" sz="1800" b="1" i="0" dirty="0">
+                        <a:solidFill>
+                          <a:srgbClr val="FFFFFF"/>
+                        </a:solidFill>
+                        <a:effectLst/>
+                        <a:latin typeface="-apple-system-body"/>
+                      </a:endParaRPr>
+                    </a:p>
+                  </a:txBody>
+                  <a:tcPr anchor="ctr"/>
+                </a:tc>
+                <a:extLst>
+                  <a:ext uri="{0D108BD9-81ED-4DB2-BD59-A6C34878D82A}">
+                    <a16:rowId xmlns:a16="http://schemas.microsoft.com/office/drawing/2014/main" val="3849586957"/>
+                  </a:ext>
+                </a:extLst>
+              </a:tr>
+              <a:tr h="365760">
+                <a:tc>
+                  <a:txBody>
+                    <a:bodyPr/>
+                    <a:lstStyle/>
+                    <a:p>
+                      <a:pPr marL="0" marR="0" algn="l">
+                        <a:buNone/>
+                      </a:pPr>
+                      <a:r>
+                        <a:rPr lang="en-US" sz="1800">
+                          <a:effectLst/>
+                        </a:rPr>
+                        <a:t>Unit</a:t>
+                      </a:r>
+                      <a:endParaRPr lang="en-US" sz="1800" b="0" i="0">
+                        <a:solidFill>
+                          <a:srgbClr val="FFFFFF"/>
+                        </a:solidFill>
+                        <a:effectLst/>
+                        <a:latin typeface="-apple-system-body"/>
+                      </a:endParaRPr>
+                    </a:p>
+                  </a:txBody>
+                  <a:tcPr anchor="ctr"/>
+                </a:tc>
+                <a:tc>
+                  <a:txBody>
+                    <a:bodyPr/>
+                    <a:lstStyle/>
+                    <a:p>
+                      <a:pPr marL="0" marR="0" algn="l">
+                        <a:buNone/>
+                      </a:pPr>
+                      <a:r>
+                        <a:rPr lang="en-US" sz="1800">
+                          <a:effectLst/>
+                        </a:rPr>
+                        <a:t>One small unit of code</a:t>
+                      </a:r>
+                      <a:endParaRPr lang="en-US" sz="1800" b="0" i="0">
+                        <a:solidFill>
+                          <a:srgbClr val="FFFFFF"/>
+                        </a:solidFill>
+                        <a:effectLst/>
+                        <a:latin typeface="-apple-system-body"/>
+                      </a:endParaRPr>
+                    </a:p>
+                  </a:txBody>
+                  <a:tcPr anchor="ctr"/>
+                </a:tc>
+                <a:tc>
+                  <a:txBody>
+                    <a:bodyPr/>
+                    <a:lstStyle/>
+                    <a:p>
+                      <a:pPr marL="0" marR="0" algn="r">
+                        <a:buNone/>
+                      </a:pPr>
+                      <a:r>
+                        <a:rPr lang="en-US" sz="1800">
+                          <a:effectLst/>
+                        </a:rPr>
+                        <a:t>Very fast</a:t>
+                      </a:r>
+                      <a:endParaRPr lang="en-US" sz="1800" b="0" i="0">
+                        <a:solidFill>
+                          <a:srgbClr val="FFFFFF"/>
+                        </a:solidFill>
+                        <a:effectLst/>
+                        <a:latin typeface="-apple-system-body"/>
+                      </a:endParaRPr>
+                    </a:p>
+                  </a:txBody>
+                  <a:tcPr anchor="ctr"/>
+                </a:tc>
+                <a:tc>
+                  <a:txBody>
+                    <a:bodyPr/>
+                    <a:lstStyle/>
+                    <a:p>
+                      <a:pPr marL="0" marR="0" algn="l">
+                        <a:buNone/>
+                      </a:pPr>
+                      <a:r>
+                        <a:rPr lang="en-US" sz="1800">
+                          <a:effectLst/>
+                        </a:rPr>
+                        <a:t>Test Calculator.add()</a:t>
+                      </a:r>
+                      <a:endParaRPr lang="en-US" sz="1800" b="0" i="0">
+                        <a:solidFill>
+                          <a:srgbClr val="FFFFFF"/>
+                        </a:solidFill>
+                        <a:effectLst/>
+                        <a:latin typeface="-apple-system-body"/>
+                      </a:endParaRPr>
+                    </a:p>
+                  </a:txBody>
+                  <a:tcPr anchor="ctr"/>
+                </a:tc>
+                <a:extLst>
+                  <a:ext uri="{0D108BD9-81ED-4DB2-BD59-A6C34878D82A}">
+                    <a16:rowId xmlns:a16="http://schemas.microsoft.com/office/drawing/2014/main" val="1564349986"/>
+                  </a:ext>
+                </a:extLst>
+              </a:tr>
+              <a:tr h="640080">
+                <a:tc>
+                  <a:txBody>
+                    <a:bodyPr/>
+                    <a:lstStyle/>
+                    <a:p>
+                      <a:pPr marL="0" marR="0" algn="l">
+                        <a:buNone/>
+                      </a:pPr>
+                      <a:r>
+                        <a:rPr lang="en-US" sz="1800">
+                          <a:effectLst/>
+                        </a:rPr>
+                        <a:t>Integration</a:t>
+                      </a:r>
+                      <a:endParaRPr lang="en-US" sz="1800" b="0" i="0">
+                        <a:solidFill>
+                          <a:srgbClr val="FFFFFF"/>
+                        </a:solidFill>
+                        <a:effectLst/>
+                        <a:latin typeface="-apple-system-body"/>
+                      </a:endParaRPr>
+                    </a:p>
+                  </a:txBody>
+                  <a:tcPr anchor="ctr"/>
+                </a:tc>
+                <a:tc>
+                  <a:txBody>
+                    <a:bodyPr/>
+                    <a:lstStyle/>
+                    <a:p>
+                      <a:pPr marL="0" marR="0" algn="l">
+                        <a:buNone/>
+                      </a:pPr>
+                      <a:r>
+                        <a:rPr lang="en-US" sz="1800">
+                          <a:effectLst/>
+                        </a:rPr>
+                        <a:t>Multiple components working together</a:t>
+                      </a:r>
+                      <a:endParaRPr lang="en-US" sz="1800" b="0" i="0">
+                        <a:solidFill>
+                          <a:srgbClr val="FFFFFF"/>
+                        </a:solidFill>
+                        <a:effectLst/>
+                        <a:latin typeface="-apple-system-body"/>
+                      </a:endParaRPr>
+                    </a:p>
+                  </a:txBody>
+                  <a:tcPr anchor="ctr"/>
+                </a:tc>
+                <a:tc>
+                  <a:txBody>
+                    <a:bodyPr/>
+                    <a:lstStyle/>
+                    <a:p>
+                      <a:pPr marL="0" marR="0" algn="r">
+                        <a:buNone/>
+                      </a:pPr>
+                      <a:r>
+                        <a:rPr lang="en-US" sz="1800">
+                          <a:effectLst/>
+                        </a:rPr>
+                        <a:t>Medium</a:t>
+                      </a:r>
+                      <a:endParaRPr lang="en-US" sz="1800" b="0" i="0">
+                        <a:solidFill>
+                          <a:srgbClr val="FFFFFF"/>
+                        </a:solidFill>
+                        <a:effectLst/>
+                        <a:latin typeface="-apple-system-body"/>
+                      </a:endParaRPr>
+                    </a:p>
+                  </a:txBody>
+                  <a:tcPr anchor="ctr"/>
+                </a:tc>
+                <a:tc>
+                  <a:txBody>
+                    <a:bodyPr/>
+                    <a:lstStyle/>
+                    <a:p>
+                      <a:pPr marL="0" marR="0" algn="l">
+                        <a:buNone/>
+                      </a:pPr>
+                      <a:r>
+                        <a:rPr lang="en-US" sz="1800">
+                          <a:effectLst/>
+                        </a:rPr>
+                        <a:t>Service + database</a:t>
+                      </a:r>
+                      <a:endParaRPr lang="en-US" sz="1800" b="0" i="0">
+                        <a:solidFill>
+                          <a:srgbClr val="FFFFFF"/>
+                        </a:solidFill>
+                        <a:effectLst/>
+                        <a:latin typeface="-apple-system-body"/>
+                      </a:endParaRPr>
+                    </a:p>
+                  </a:txBody>
+                  <a:tcPr anchor="ctr"/>
+                </a:tc>
+                <a:extLst>
+                  <a:ext uri="{0D108BD9-81ED-4DB2-BD59-A6C34878D82A}">
+                    <a16:rowId xmlns:a16="http://schemas.microsoft.com/office/drawing/2014/main" val="1586323044"/>
+                  </a:ext>
+                </a:extLst>
+              </a:tr>
+              <a:tr h="640080">
+                <a:tc>
+                  <a:txBody>
+                    <a:bodyPr/>
+                    <a:lstStyle/>
+                    <a:p>
+                      <a:pPr marL="0" marR="0" algn="l">
+                        <a:buNone/>
+                      </a:pPr>
+                      <a:r>
+                        <a:rPr lang="en-US" sz="1800">
+                          <a:effectLst/>
+                        </a:rPr>
+                        <a:t>System / end-to-end</a:t>
+                      </a:r>
+                      <a:endParaRPr lang="en-US" sz="1800" b="0" i="0">
+                        <a:solidFill>
+                          <a:srgbClr val="FFFFFF"/>
+                        </a:solidFill>
+                        <a:effectLst/>
+                        <a:latin typeface="-apple-system-body"/>
+                      </a:endParaRPr>
+                    </a:p>
+                  </a:txBody>
+                  <a:tcPr anchor="ctr"/>
+                </a:tc>
+                <a:tc>
+                  <a:txBody>
+                    <a:bodyPr/>
+                    <a:lstStyle/>
+                    <a:p>
+                      <a:pPr marL="0" marR="0" algn="l">
+                        <a:buNone/>
+                      </a:pPr>
+                      <a:r>
+                        <a:rPr lang="en-US" sz="1800">
+                          <a:effectLst/>
+                        </a:rPr>
+                        <a:t>The complete application or a major workflow</a:t>
+                      </a:r>
+                      <a:endParaRPr lang="en-US" sz="1800" b="0" i="0">
+                        <a:solidFill>
+                          <a:srgbClr val="FFFFFF"/>
+                        </a:solidFill>
+                        <a:effectLst/>
+                        <a:latin typeface="-apple-system-body"/>
+                      </a:endParaRPr>
+                    </a:p>
+                  </a:txBody>
+                  <a:tcPr anchor="ctr"/>
+                </a:tc>
+                <a:tc>
+                  <a:txBody>
+                    <a:bodyPr/>
+                    <a:lstStyle/>
+                    <a:p>
+                      <a:pPr marL="0" marR="0" algn="r">
+                        <a:buNone/>
+                      </a:pPr>
+                      <a:r>
+                        <a:rPr lang="en-US" sz="1800">
+                          <a:effectLst/>
+                        </a:rPr>
+                        <a:t>Slow</a:t>
+                      </a:r>
+                      <a:endParaRPr lang="en-US" sz="1800" b="0" i="0">
+                        <a:solidFill>
+                          <a:srgbClr val="FFFFFF"/>
+                        </a:solidFill>
+                        <a:effectLst/>
+                        <a:latin typeface="-apple-system-body"/>
+                      </a:endParaRPr>
+                    </a:p>
+                  </a:txBody>
+                  <a:tcPr anchor="ctr"/>
+                </a:tc>
+                <a:tc>
+                  <a:txBody>
+                    <a:bodyPr/>
+                    <a:lstStyle/>
+                    <a:p>
+                      <a:pPr marL="0" marR="0" algn="l">
+                        <a:buNone/>
+                      </a:pPr>
+                      <a:r>
+                        <a:rPr lang="en-US" sz="1800">
+                          <a:effectLst/>
+                        </a:rPr>
+                        <a:t>Log in → buy product → receive confirmation</a:t>
+                      </a:r>
+                      <a:endParaRPr lang="en-US" sz="1800" b="0" i="0">
+                        <a:solidFill>
+                          <a:srgbClr val="FFFFFF"/>
+                        </a:solidFill>
+                        <a:effectLst/>
+                        <a:latin typeface="-apple-system-body"/>
+                      </a:endParaRPr>
+                    </a:p>
+                  </a:txBody>
+                  <a:tcPr anchor="ctr"/>
+                </a:tc>
+                <a:extLst>
+                  <a:ext uri="{0D108BD9-81ED-4DB2-BD59-A6C34878D82A}">
+                    <a16:rowId xmlns:a16="http://schemas.microsoft.com/office/drawing/2014/main" val="911420444"/>
+                  </a:ext>
+                </a:extLst>
+              </a:tr>
+              <a:tr h="914400">
+                <a:tc>
+                  <a:txBody>
+                    <a:bodyPr/>
+                    <a:lstStyle/>
+                    <a:p>
+                      <a:pPr marL="0" marR="0" algn="l">
+                        <a:buNone/>
+                      </a:pPr>
+                      <a:r>
+                        <a:rPr lang="en-US" sz="1800">
+                          <a:effectLst/>
+                        </a:rPr>
+                        <a:t>Acceptance</a:t>
+                      </a:r>
+                      <a:endParaRPr lang="en-US" sz="1800" b="0" i="0">
+                        <a:solidFill>
+                          <a:srgbClr val="FFFFFF"/>
+                        </a:solidFill>
+                        <a:effectLst/>
+                        <a:latin typeface="-apple-system-body"/>
+                      </a:endParaRPr>
+                    </a:p>
+                  </a:txBody>
+                  <a:tcPr anchor="ctr"/>
+                </a:tc>
+                <a:tc>
+                  <a:txBody>
+                    <a:bodyPr/>
+                    <a:lstStyle/>
+                    <a:p>
+                      <a:pPr marL="0" marR="0" algn="l">
+                        <a:buNone/>
+                      </a:pPr>
+                      <a:r>
+                        <a:rPr lang="en-US" sz="1800">
+                          <a:effectLst/>
+                        </a:rPr>
+                        <a:t>Whether the system meets specified business/user requirements</a:t>
+                      </a:r>
+                      <a:endParaRPr lang="en-US" sz="1800" b="0" i="0">
+                        <a:solidFill>
+                          <a:srgbClr val="FFFFFF"/>
+                        </a:solidFill>
+                        <a:effectLst/>
+                        <a:latin typeface="-apple-system-body"/>
+                      </a:endParaRPr>
+                    </a:p>
+                  </a:txBody>
+                  <a:tcPr anchor="ctr"/>
+                </a:tc>
+                <a:tc>
+                  <a:txBody>
+                    <a:bodyPr/>
+                    <a:lstStyle/>
+                    <a:p>
+                      <a:pPr marL="0" marR="0" algn="r">
+                        <a:buNone/>
+                      </a:pPr>
+                      <a:r>
+                        <a:rPr lang="en-US" sz="1800">
+                          <a:effectLst/>
+                        </a:rPr>
+                        <a:t>Often slower</a:t>
+                      </a:r>
+                      <a:endParaRPr lang="en-US" sz="1800" b="0" i="0">
+                        <a:solidFill>
+                          <a:srgbClr val="FFFFFF"/>
+                        </a:solidFill>
+                        <a:effectLst/>
+                        <a:latin typeface="-apple-system-body"/>
+                      </a:endParaRPr>
+                    </a:p>
+                  </a:txBody>
+                  <a:tcPr anchor="ctr"/>
+                </a:tc>
+                <a:tc>
+                  <a:txBody>
+                    <a:bodyPr/>
+                    <a:lstStyle/>
+                    <a:p>
+                      <a:pPr marL="0" marR="0" algn="l">
+                        <a:buNone/>
+                      </a:pPr>
+                      <a:r>
+                        <a:rPr lang="en-US" sz="1800" dirty="0">
+                          <a:effectLst/>
+                        </a:rPr>
+                        <a:t>"A customer can successfully check out"</a:t>
+                      </a:r>
+                      <a:endParaRPr lang="en-US" sz="1800" b="0" i="0" dirty="0">
+                        <a:solidFill>
+                          <a:srgbClr val="FFFFFF"/>
+                        </a:solidFill>
+                        <a:effectLst/>
+                        <a:latin typeface="-apple-system-body"/>
+                      </a:endParaRPr>
+                    </a:p>
+                  </a:txBody>
+                  <a:tcPr anchor="ctr"/>
+                </a:tc>
+                <a:extLst>
+                  <a:ext uri="{0D108BD9-81ED-4DB2-BD59-A6C34878D82A}">
+                    <a16:rowId xmlns:a16="http://schemas.microsoft.com/office/drawing/2014/main" val="3689371093"/>
+                  </a:ext>
+                </a:extLst>
+              </a:tr>
+            </a:tbl>
+          </a:graphicData>
+        </a:graphic>
+      </p:graphicFrame>
+    </p:spTree>
+    <p:extLst>
+      <p:ext uri="{BB962C8B-B14F-4D97-AF65-F5344CB8AC3E}">
+        <p14:creationId xmlns:p14="http://schemas.microsoft.com/office/powerpoint/2010/main" val="198918569"/>
+      </p:ext>
+    </p:extLst>
+  </p:cSld>
+  <p:clrMapOvr>
+    <a:masterClrMapping/>
+  </p:clrMapOvr>
+</p:sld>
+</file>
+
+<file path=ppt/slides/slide5.xml><?xml version="1.0" encoding="utf-8"?>
+<p:sld xmlns:a="http://schemas.openxmlformats.org/drawingml/2006/main" xmlns:r="http://schemas.openxmlformats.org/officeDocument/2006/relationships" xmlns:p="http://schemas.openxmlformats.org/presentationml/2006/main">
+  <p:cSld>
+    <p:spTree>
+      <p:nvGrpSpPr>
+        <p:cNvPr id="1" name=""/>
+        <p:cNvGrpSpPr/>
+        <p:nvPr/>
+      </p:nvGrpSpPr>
+      <p:grpSpPr>
+        <a:xfrm>
+          <a:off x="0" y="0"/>
+          <a:ext cx="0" cy="0"/>
+          <a:chOff x="0" y="0"/>
+          <a:chExt cx="0" cy="0"/>
+        </a:xfrm>
+      </p:grpSpPr>
+      <p:sp>
+        <p:nvSpPr>
+          <p:cNvPr id="2" name="Title 1">
+            <a:extLst>
+              <a:ext uri="{FF2B5EF4-FFF2-40B4-BE49-F238E27FC236}">
+                <a16:creationId xmlns:a16="http://schemas.microsoft.com/office/drawing/2014/main" id="{D3096E38-3AA5-A20F-3963-5B53D7E76FB9}"/>
+              </a:ext>
+            </a:extLst>
+          </p:cNvPr>
+          <p:cNvSpPr>
+            <a:spLocks noGrp="1"/>
+          </p:cNvSpPr>
+          <p:nvPr>
+            <p:ph type="title"/>
+          </p:nvPr>
+        </p:nvSpPr>
+        <p:spPr/>
+        <p:txBody>
+          <a:bodyPr/>
+          <a:lstStyle/>
+          <a:p>
+            <a:r>
+              <a:rPr lang="en-US" dirty="0"/>
+              <a:t>Why write unit tests?</a:t>
+            </a:r>
+          </a:p>
+        </p:txBody>
+      </p:sp>
+      <p:sp>
+        <p:nvSpPr>
+          <p:cNvPr id="3" name="Content Placeholder 2">
+            <a:extLst>
+              <a:ext uri="{FF2B5EF4-FFF2-40B4-BE49-F238E27FC236}">
+                <a16:creationId xmlns:a16="http://schemas.microsoft.com/office/drawing/2014/main" id="{B416F4A8-DB1F-58FC-DB69-7AE0B8961CB0}"/>
+              </a:ext>
+            </a:extLst>
+          </p:cNvPr>
+          <p:cNvSpPr>
+            <a:spLocks noGrp="1"/>
+          </p:cNvSpPr>
+          <p:nvPr>
+            <p:ph idx="1"/>
+          </p:nvPr>
+        </p:nvSpPr>
+        <p:spPr>
+          <a:xfrm>
+            <a:off x="581192" y="2180496"/>
+            <a:ext cx="11029615" cy="1853693"/>
+          </a:xfrm>
+        </p:spPr>
+        <p:txBody>
+          <a:bodyPr/>
+          <a:lstStyle/>
+          <a:p>
+            <a:r>
+              <a:rPr lang="en-US" dirty="0"/>
+              <a:t>Unit tests help us catch regressions</a:t>
+            </a:r>
+          </a:p>
+          <a:p>
+            <a:r>
+              <a:rPr lang="en-US" dirty="0"/>
+              <a:t>For example, imagine we write a test that checks whether a $100 purchase receives a $10 discount </a:t>
+            </a:r>
+          </a:p>
+          <a:p>
+            <a:pPr lvl="1"/>
+            <a:r>
+              <a:rPr lang="en-US" dirty="0"/>
+              <a:t>Later, someone changes the implementation, and the test fails as a result</a:t>
+            </a:r>
+          </a:p>
+          <a:p>
+            <a:pPr lvl="1"/>
+            <a:r>
+              <a:rPr lang="en-US" dirty="0"/>
+              <a:t>Without the test, the bug might not be discovered until much later </a:t>
+            </a:r>
+          </a:p>
+        </p:txBody>
+      </p:sp>
+      <p:sp>
+        <p:nvSpPr>
+          <p:cNvPr id="5" name="TextBox 4">
+            <a:extLst>
+              <a:ext uri="{FF2B5EF4-FFF2-40B4-BE49-F238E27FC236}">
+                <a16:creationId xmlns:a16="http://schemas.microsoft.com/office/drawing/2014/main" id="{FCADA6CE-B252-FFE4-7C5A-BD9B74936F28}"/>
+              </a:ext>
+            </a:extLst>
+          </p:cNvPr>
+          <p:cNvSpPr txBox="1"/>
+          <p:nvPr/>
+        </p:nvSpPr>
+        <p:spPr>
+          <a:xfrm>
+            <a:off x="472335" y="4746031"/>
+            <a:ext cx="4748931" cy="923330"/>
+          </a:xfrm>
+          <a:prstGeom prst="rect">
+            <a:avLst/>
+          </a:prstGeom>
+          <a:noFill/>
+        </p:spPr>
+        <p:txBody>
+          <a:bodyPr wrap="square">
+            <a:spAutoFit/>
+          </a:bodyPr>
+          <a:lstStyle/>
+          <a:p>
+            <a:r>
+              <a:rPr lang="en-US" dirty="0"/>
+              <a:t>public double </a:t>
+            </a:r>
+            <a:r>
+              <a:rPr lang="en-US" dirty="0" err="1"/>
+              <a:t>calculateDiscount</a:t>
+            </a:r>
+            <a:r>
+              <a:rPr lang="en-US" dirty="0"/>
+              <a:t>(double price) {</a:t>
+            </a:r>
+          </a:p>
+          <a:p>
+            <a:r>
+              <a:rPr lang="en-US" dirty="0"/>
+              <a:t>    return price * 0.10;</a:t>
+            </a:r>
+          </a:p>
+          <a:p>
+            <a:r>
+              <a:rPr lang="en-US" dirty="0"/>
+              <a:t>}</a:t>
+            </a:r>
+          </a:p>
+        </p:txBody>
+      </p:sp>
+      <p:sp>
+        <p:nvSpPr>
+          <p:cNvPr id="7" name="TextBox 6">
+            <a:extLst>
+              <a:ext uri="{FF2B5EF4-FFF2-40B4-BE49-F238E27FC236}">
+                <a16:creationId xmlns:a16="http://schemas.microsoft.com/office/drawing/2014/main" id="{74D0D47D-0626-C38C-644D-1DA40899F8C7}"/>
+              </a:ext>
+            </a:extLst>
+          </p:cNvPr>
+          <p:cNvSpPr txBox="1"/>
+          <p:nvPr/>
+        </p:nvSpPr>
+        <p:spPr>
+          <a:xfrm>
+            <a:off x="5622621" y="4682688"/>
+            <a:ext cx="6097044" cy="1200329"/>
+          </a:xfrm>
+          <a:prstGeom prst="rect">
+            <a:avLst/>
+          </a:prstGeom>
+          <a:noFill/>
+        </p:spPr>
+        <p:txBody>
+          <a:bodyPr wrap="square">
+            <a:spAutoFit/>
+          </a:bodyPr>
+          <a:lstStyle/>
+          <a:p>
+            <a:r>
+              <a:rPr lang="en-US" dirty="0"/>
+              <a:t>@Test</a:t>
+            </a:r>
+          </a:p>
+          <a:p>
+            <a:r>
+              <a:rPr lang="en-US" dirty="0"/>
+              <a:t>void calculateDiscount_for100Dollars_returns10Dollars() {</a:t>
+            </a:r>
+          </a:p>
+          <a:p>
+            <a:r>
+              <a:rPr lang="en-US" dirty="0"/>
+              <a:t>    </a:t>
+            </a:r>
+            <a:r>
+              <a:rPr lang="en-US" dirty="0" err="1"/>
+              <a:t>assertEquals</a:t>
+            </a:r>
+            <a:r>
+              <a:rPr lang="en-US" dirty="0"/>
+              <a:t>(10.0, </a:t>
+            </a:r>
+            <a:r>
+              <a:rPr lang="en-US" dirty="0" err="1"/>
+              <a:t>calculator.calculateDiscount</a:t>
+            </a:r>
+            <a:r>
+              <a:rPr lang="en-US" dirty="0"/>
+              <a:t>(100.0));</a:t>
+            </a:r>
+          </a:p>
+          <a:p>
+            <a:r>
+              <a:rPr lang="en-US" dirty="0"/>
+              <a:t>}</a:t>
+            </a:r>
+          </a:p>
+        </p:txBody>
+      </p:sp>
+      <p:sp>
+        <p:nvSpPr>
+          <p:cNvPr id="8" name="TextBox 7">
+            <a:extLst>
+              <a:ext uri="{FF2B5EF4-FFF2-40B4-BE49-F238E27FC236}">
+                <a16:creationId xmlns:a16="http://schemas.microsoft.com/office/drawing/2014/main" id="{3D35BCB7-8C5B-5EFB-DB5D-3898742C75AB}"/>
+              </a:ext>
+            </a:extLst>
+          </p:cNvPr>
+          <p:cNvSpPr txBox="1"/>
+          <p:nvPr/>
+        </p:nvSpPr>
+        <p:spPr>
+          <a:xfrm>
+            <a:off x="6231698" y="4360229"/>
+            <a:ext cx="4233275" cy="276999"/>
+          </a:xfrm>
+          <a:prstGeom prst="rect">
+            <a:avLst/>
+          </a:prstGeom>
+          <a:noFill/>
+        </p:spPr>
+        <p:txBody>
+          <a:bodyPr wrap="none" rtlCol="0">
+            <a:spAutoFit/>
+          </a:bodyPr>
+          <a:lstStyle/>
+          <a:p>
+            <a:r>
+              <a:rPr lang="en-US" sz="1200" dirty="0"/>
+              <a:t>Tests should be self-documenting, with clear naming conventions:</a:t>
+            </a:r>
+          </a:p>
+        </p:txBody>
+      </p:sp>
+    </p:spTree>
+    <p:extLst>
+      <p:ext uri="{BB962C8B-B14F-4D97-AF65-F5344CB8AC3E}">
+        <p14:creationId xmlns:p14="http://schemas.microsoft.com/office/powerpoint/2010/main" val="1702540923"/>
+      </p:ext>
+    </p:extLst>
+  </p:cSld>
+  <p:clrMapOvr>
+    <a:masterClrMapping/>
+  </p:clrMapOvr>
+</p:sld>
+</file>
+
+<file path=ppt/slides/slide6.xml><?xml version="1.0" encoding="utf-8"?>
+<p:sld xmlns:a="http://schemas.openxmlformats.org/drawingml/2006/main" xmlns:r="http://schemas.openxmlformats.org/officeDocument/2006/relationships" xmlns:p="http://schemas.openxmlformats.org/presentationml/2006/main">
+  <p:cSld>
+    <p:spTree>
+      <p:nvGrpSpPr>
+        <p:cNvPr id="1" name=""/>
+        <p:cNvGrpSpPr/>
+        <p:nvPr/>
+      </p:nvGrpSpPr>
+      <p:grpSpPr>
+        <a:xfrm>
+          <a:off x="0" y="0"/>
+          <a:ext cx="0" cy="0"/>
+          <a:chOff x="0" y="0"/>
+          <a:chExt cx="0" cy="0"/>
+        </a:xfrm>
+      </p:grpSpPr>
+      <p:sp>
+        <p:nvSpPr>
+          <p:cNvPr id="2" name="Title 1">
+            <a:extLst>
+              <a:ext uri="{FF2B5EF4-FFF2-40B4-BE49-F238E27FC236}">
+                <a16:creationId xmlns:a16="http://schemas.microsoft.com/office/drawing/2014/main" id="{85B6A614-0CBE-24EF-2378-A82C450E8A20}"/>
+              </a:ext>
+            </a:extLst>
+          </p:cNvPr>
+          <p:cNvSpPr>
+            <a:spLocks noGrp="1"/>
+          </p:cNvSpPr>
+          <p:nvPr>
+            <p:ph type="title"/>
+          </p:nvPr>
+        </p:nvSpPr>
+        <p:spPr/>
+        <p:txBody>
+          <a:bodyPr/>
+          <a:lstStyle/>
+          <a:p>
+            <a:r>
+              <a:rPr lang="en-US" dirty="0"/>
+              <a:t>Design decisions, and why they make testing easier</a:t>
+            </a:r>
+          </a:p>
+        </p:txBody>
+      </p:sp>
+      <p:sp>
+        <p:nvSpPr>
+          <p:cNvPr id="3" name="Content Placeholder 2">
+            <a:extLst>
+              <a:ext uri="{FF2B5EF4-FFF2-40B4-BE49-F238E27FC236}">
+                <a16:creationId xmlns:a16="http://schemas.microsoft.com/office/drawing/2014/main" id="{8BEA635E-D5A7-E8C4-B29F-6CD4D1A77211}"/>
+              </a:ext>
+            </a:extLst>
+          </p:cNvPr>
+          <p:cNvSpPr>
+            <a:spLocks noGrp="1"/>
+          </p:cNvSpPr>
+          <p:nvPr>
+            <p:ph idx="1"/>
+          </p:nvPr>
+        </p:nvSpPr>
+        <p:spPr>
+          <a:xfrm>
+            <a:off x="581192" y="2180497"/>
+            <a:ext cx="4861367" cy="1339318"/>
+          </a:xfrm>
+        </p:spPr>
+        <p:txBody>
+          <a:bodyPr/>
+          <a:lstStyle/>
+          <a:p>
+            <a:r>
+              <a:rPr lang="en-US" dirty="0"/>
+              <a:t>Injecting dependencies into service classes, allows us to mock dependencies, rather than needing to test data access code directly </a:t>
+            </a:r>
+          </a:p>
+        </p:txBody>
+      </p:sp>
+      <p:sp>
+        <p:nvSpPr>
+          <p:cNvPr id="5" name="TextBox 4">
+            <a:extLst>
+              <a:ext uri="{FF2B5EF4-FFF2-40B4-BE49-F238E27FC236}">
+                <a16:creationId xmlns:a16="http://schemas.microsoft.com/office/drawing/2014/main" id="{2AAF9A67-055A-FEF5-241F-B621FB142AD9}"/>
+              </a:ext>
+            </a:extLst>
+          </p:cNvPr>
+          <p:cNvSpPr txBox="1"/>
+          <p:nvPr/>
+        </p:nvSpPr>
+        <p:spPr>
+          <a:xfrm>
+            <a:off x="712418" y="3903222"/>
+            <a:ext cx="4297993" cy="2308324"/>
+          </a:xfrm>
+          <a:prstGeom prst="rect">
+            <a:avLst/>
+          </a:prstGeom>
+          <a:noFill/>
+        </p:spPr>
+        <p:txBody>
+          <a:bodyPr wrap="square">
+            <a:spAutoFit/>
+          </a:bodyPr>
+          <a:lstStyle/>
+          <a:p>
+            <a:r>
+              <a:rPr lang="en-US" dirty="0"/>
+              <a:t>public class </a:t>
+            </a:r>
+            <a:r>
+              <a:rPr lang="en-US" dirty="0" err="1"/>
+              <a:t>OrderService</a:t>
+            </a:r>
+            <a:r>
+              <a:rPr lang="en-US" dirty="0"/>
+              <a:t> {</a:t>
+            </a:r>
+          </a:p>
+          <a:p>
+            <a:r>
+              <a:rPr lang="en-US" dirty="0"/>
+              <a:t>    public void </a:t>
+            </a:r>
+            <a:r>
+              <a:rPr lang="en-US" dirty="0" err="1"/>
+              <a:t>placeOrder</a:t>
+            </a:r>
+            <a:r>
+              <a:rPr lang="en-US" dirty="0"/>
+              <a:t>(Order order) {</a:t>
+            </a:r>
+          </a:p>
+          <a:p>
+            <a:r>
+              <a:rPr lang="en-US" dirty="0"/>
+              <a:t>        // directly connects to database</a:t>
+            </a:r>
+          </a:p>
+          <a:p>
+            <a:r>
+              <a:rPr lang="en-US" dirty="0"/>
+              <a:t>        // directly sends email</a:t>
+            </a:r>
+          </a:p>
+          <a:p>
+            <a:r>
+              <a:rPr lang="en-US" dirty="0"/>
+              <a:t>        // directly charges credit card</a:t>
+            </a:r>
+          </a:p>
+          <a:p>
+            <a:r>
+              <a:rPr lang="en-US" dirty="0"/>
+              <a:t>        // ...</a:t>
+            </a:r>
+          </a:p>
+          <a:p>
+            <a:r>
+              <a:rPr lang="en-US" dirty="0"/>
+              <a:t>    }</a:t>
+            </a:r>
+          </a:p>
+          <a:p>
+            <a:r>
+              <a:rPr lang="en-US" dirty="0"/>
+              <a:t>}</a:t>
+            </a:r>
+          </a:p>
+        </p:txBody>
+      </p:sp>
+      <p:sp>
+        <p:nvSpPr>
+          <p:cNvPr id="7" name="TextBox 6">
+            <a:extLst>
+              <a:ext uri="{FF2B5EF4-FFF2-40B4-BE49-F238E27FC236}">
+                <a16:creationId xmlns:a16="http://schemas.microsoft.com/office/drawing/2014/main" id="{24FBA33C-7AFD-32DB-0B43-664DDA2BEFB8}"/>
+              </a:ext>
+            </a:extLst>
+          </p:cNvPr>
+          <p:cNvSpPr txBox="1"/>
+          <p:nvPr/>
+        </p:nvSpPr>
+        <p:spPr>
+          <a:xfrm>
+            <a:off x="5722829" y="2241228"/>
+            <a:ext cx="6097044" cy="3970318"/>
+          </a:xfrm>
+          <a:prstGeom prst="rect">
+            <a:avLst/>
+          </a:prstGeom>
+          <a:noFill/>
+        </p:spPr>
+        <p:txBody>
+          <a:bodyPr wrap="square">
+            <a:spAutoFit/>
+          </a:bodyPr>
+          <a:lstStyle/>
+          <a:p>
+            <a:r>
+              <a:rPr lang="en-US" dirty="0"/>
+              <a:t>public class </a:t>
+            </a:r>
+            <a:r>
+              <a:rPr lang="en-US" dirty="0" err="1"/>
+              <a:t>OrderService</a:t>
+            </a:r>
+            <a:r>
+              <a:rPr lang="en-US" dirty="0"/>
+              <a:t> {</a:t>
+            </a:r>
+          </a:p>
+          <a:p>
+            <a:endParaRPr lang="en-US" dirty="0"/>
+          </a:p>
+          <a:p>
+            <a:r>
+              <a:rPr lang="en-US" dirty="0"/>
+              <a:t>    private final </a:t>
+            </a:r>
+            <a:r>
+              <a:rPr lang="en-US" dirty="0" err="1"/>
+              <a:t>PaymentService</a:t>
+            </a:r>
+            <a:r>
+              <a:rPr lang="en-US" dirty="0"/>
+              <a:t> </a:t>
+            </a:r>
+            <a:r>
+              <a:rPr lang="en-US" dirty="0" err="1"/>
+              <a:t>paymentService</a:t>
+            </a:r>
+            <a:r>
+              <a:rPr lang="en-US" dirty="0"/>
+              <a:t>;</a:t>
+            </a:r>
+          </a:p>
+          <a:p>
+            <a:r>
+              <a:rPr lang="en-US" dirty="0"/>
+              <a:t>    private final </a:t>
+            </a:r>
+            <a:r>
+              <a:rPr lang="en-US" dirty="0" err="1"/>
+              <a:t>EmailService</a:t>
+            </a:r>
+            <a:r>
+              <a:rPr lang="en-US" dirty="0"/>
+              <a:t> </a:t>
+            </a:r>
+            <a:r>
+              <a:rPr lang="en-US" dirty="0" err="1"/>
+              <a:t>emailService</a:t>
+            </a:r>
+            <a:r>
+              <a:rPr lang="en-US" dirty="0"/>
+              <a:t>;</a:t>
+            </a:r>
+          </a:p>
+          <a:p>
+            <a:endParaRPr lang="en-US" dirty="0"/>
+          </a:p>
+          <a:p>
+            <a:r>
+              <a:rPr lang="en-US" dirty="0"/>
+              <a:t>    public </a:t>
+            </a:r>
+            <a:r>
+              <a:rPr lang="en-US" dirty="0" err="1"/>
+              <a:t>OrderService</a:t>
+            </a:r>
+            <a:r>
+              <a:rPr lang="en-US" dirty="0"/>
+              <a:t>(</a:t>
+            </a:r>
+          </a:p>
+          <a:p>
+            <a:r>
+              <a:rPr lang="en-US" dirty="0"/>
+              <a:t>            </a:t>
+            </a:r>
+            <a:r>
+              <a:rPr lang="en-US" dirty="0" err="1"/>
+              <a:t>PaymentService</a:t>
+            </a:r>
+            <a:r>
+              <a:rPr lang="en-US" dirty="0"/>
+              <a:t> </a:t>
+            </a:r>
+            <a:r>
+              <a:rPr lang="en-US" dirty="0" err="1"/>
+              <a:t>paymentService</a:t>
+            </a:r>
+            <a:r>
+              <a:rPr lang="en-US" dirty="0"/>
+              <a:t>,</a:t>
+            </a:r>
+          </a:p>
+          <a:p>
+            <a:r>
+              <a:rPr lang="en-US" dirty="0"/>
+              <a:t>            </a:t>
+            </a:r>
+            <a:r>
+              <a:rPr lang="en-US" dirty="0" err="1"/>
+              <a:t>EmailService</a:t>
+            </a:r>
+            <a:r>
+              <a:rPr lang="en-US" dirty="0"/>
+              <a:t> </a:t>
+            </a:r>
+            <a:r>
+              <a:rPr lang="en-US" dirty="0" err="1"/>
+              <a:t>emailService</a:t>
+            </a:r>
+            <a:r>
+              <a:rPr lang="en-US" dirty="0"/>
+              <a:t>) {</a:t>
+            </a:r>
+          </a:p>
+          <a:p>
+            <a:r>
+              <a:rPr lang="en-US" dirty="0"/>
+              <a:t>        </a:t>
+            </a:r>
+            <a:r>
+              <a:rPr lang="en-US" dirty="0" err="1"/>
+              <a:t>this.paymentService</a:t>
+            </a:r>
+            <a:r>
+              <a:rPr lang="en-US" dirty="0"/>
+              <a:t> = </a:t>
+            </a:r>
+            <a:r>
+              <a:rPr lang="en-US" dirty="0" err="1"/>
+              <a:t>paymentService</a:t>
+            </a:r>
+            <a:r>
+              <a:rPr lang="en-US" dirty="0"/>
+              <a:t>;</a:t>
+            </a:r>
+          </a:p>
+          <a:p>
+            <a:r>
+              <a:rPr lang="en-US" dirty="0"/>
+              <a:t>        </a:t>
+            </a:r>
+            <a:r>
+              <a:rPr lang="en-US" dirty="0" err="1"/>
+              <a:t>this.emailService</a:t>
+            </a:r>
+            <a:r>
+              <a:rPr lang="en-US" dirty="0"/>
+              <a:t> = </a:t>
+            </a:r>
+            <a:r>
+              <a:rPr lang="en-US" dirty="0" err="1"/>
+              <a:t>emailService</a:t>
+            </a:r>
+            <a:r>
+              <a:rPr lang="en-US" dirty="0"/>
+              <a:t>;</a:t>
+            </a:r>
+          </a:p>
+          <a:p>
+            <a:r>
+              <a:rPr lang="en-US" dirty="0"/>
+              <a:t>    }</a:t>
+            </a:r>
+          </a:p>
+          <a:p>
+            <a:endParaRPr lang="en-US" dirty="0"/>
+          </a:p>
+          <a:p>
+            <a:r>
+              <a:rPr lang="en-US" dirty="0"/>
+              <a:t>    // ...</a:t>
+            </a:r>
+          </a:p>
+          <a:p>
+            <a:r>
+              <a:rPr lang="en-US" dirty="0"/>
+              <a:t>}</a:t>
+            </a:r>
+          </a:p>
+        </p:txBody>
+      </p:sp>
+    </p:spTree>
+    <p:extLst>
+      <p:ext uri="{BB962C8B-B14F-4D97-AF65-F5344CB8AC3E}">
+        <p14:creationId xmlns:p14="http://schemas.microsoft.com/office/powerpoint/2010/main" val="2880333717"/>
+      </p:ext>
+    </p:extLst>
+  </p:cSld>
+  <p:clrMapOvr>
+    <a:masterClrMapping/>
+  </p:clrMapOvr>
+</p:sld>
+</file>
+
+<file path=ppt/slides/slide7.xml><?xml version="1.0" encoding="utf-8"?>
+<p:sld xmlns:a="http://schemas.openxmlformats.org/drawingml/2006/main" xmlns:r="http://schemas.openxmlformats.org/officeDocument/2006/relationships" xmlns:p="http://schemas.openxmlformats.org/presentationml/2006/main">
+  <p:cSld>
+    <p:spTree>
+      <p:nvGrpSpPr>
+        <p:cNvPr id="1" name=""/>
+        <p:cNvGrpSpPr/>
+        <p:nvPr/>
+      </p:nvGrpSpPr>
+      <p:grpSpPr>
+        <a:xfrm>
+          <a:off x="0" y="0"/>
+          <a:ext cx="0" cy="0"/>
+          <a:chOff x="0" y="0"/>
+          <a:chExt cx="0" cy="0"/>
+        </a:xfrm>
+      </p:grpSpPr>
+      <p:sp>
+        <p:nvSpPr>
+          <p:cNvPr id="2" name="Title 1">
+            <a:extLst>
+              <a:ext uri="{FF2B5EF4-FFF2-40B4-BE49-F238E27FC236}">
+                <a16:creationId xmlns:a16="http://schemas.microsoft.com/office/drawing/2014/main" id="{A73C56EA-3A6A-8F0B-EEA3-A52CC41B1D57}"/>
+              </a:ext>
+            </a:extLst>
+          </p:cNvPr>
+          <p:cNvSpPr>
+            <a:spLocks noGrp="1"/>
+          </p:cNvSpPr>
+          <p:nvPr>
+            <p:ph type="title"/>
+          </p:nvPr>
+        </p:nvSpPr>
+        <p:spPr/>
+        <p:txBody>
+          <a:bodyPr/>
+          <a:lstStyle/>
+          <a:p>
+            <a:r>
+              <a:rPr lang="en-US" dirty="0"/>
+              <a:t>Junit</a:t>
+            </a:r>
+          </a:p>
+        </p:txBody>
+      </p:sp>
+      <p:sp>
+        <p:nvSpPr>
+          <p:cNvPr id="3" name="Content Placeholder 2">
+            <a:extLst>
+              <a:ext uri="{FF2B5EF4-FFF2-40B4-BE49-F238E27FC236}">
+                <a16:creationId xmlns:a16="http://schemas.microsoft.com/office/drawing/2014/main" id="{AF1BB834-729C-C3AD-5C8F-FDA91B26060C}"/>
+              </a:ext>
+            </a:extLst>
+          </p:cNvPr>
+          <p:cNvSpPr>
+            <a:spLocks noGrp="1"/>
+          </p:cNvSpPr>
+          <p:nvPr>
+            <p:ph idx="1"/>
+          </p:nvPr>
+        </p:nvSpPr>
+        <p:spPr/>
+        <p:txBody>
+          <a:bodyPr/>
+          <a:lstStyle/>
+          <a:p>
+            <a:r>
+              <a:rPr lang="en-US" dirty="0"/>
+              <a:t>There are several Unit Testing frameworks for Java, we will use Junit</a:t>
+            </a:r>
+          </a:p>
+          <a:p>
+            <a:r>
+              <a:rPr lang="en-US" dirty="0"/>
+              <a:t>Junit 5 is the modern implementation; it is made up of:</a:t>
+            </a:r>
+          </a:p>
+          <a:p>
+            <a:pPr lvl="1"/>
+            <a:r>
+              <a:rPr lang="en-US" dirty="0"/>
+              <a:t>Junit platform – the foundations for launching tests</a:t>
+            </a:r>
+          </a:p>
+          <a:p>
+            <a:pPr lvl="1"/>
+            <a:r>
+              <a:rPr lang="en-US" dirty="0"/>
+              <a:t>Junit Jupiter – the programming model and APIs most developers use to write Junit 5 tests</a:t>
+            </a:r>
+          </a:p>
+          <a:p>
+            <a:pPr lvl="1"/>
+            <a:r>
+              <a:rPr lang="en-US" dirty="0"/>
+              <a:t>Junit vintage – support for running older Junit 3 or 4 tests</a:t>
+            </a:r>
+          </a:p>
+          <a:p>
+            <a:r>
+              <a:rPr lang="en-US" dirty="0"/>
+              <a:t>Maven Surefire – the Maven plugin that discovers and runs tests during a Maven build</a:t>
+            </a:r>
+          </a:p>
+          <a:p>
+            <a:r>
+              <a:rPr lang="en-US" dirty="0"/>
+              <a:t>You can think of the hierarchy like this:</a:t>
+            </a:r>
+          </a:p>
+          <a:p>
+            <a:pPr lvl="1"/>
+            <a:r>
+              <a:rPr lang="en-US" dirty="0"/>
+              <a:t>Maven </a:t>
+            </a:r>
+            <a:r>
+              <a:rPr lang="en-US" dirty="0">
+                <a:sym typeface="Wingdings" panose="05000000000000000000" pitchFamily="2" charset="2"/>
+              </a:rPr>
+              <a:t> Surefire Plugin  Junit Platform  Junit Jupiter  Your @Test methods</a:t>
+            </a:r>
+            <a:r>
+              <a:rPr lang="en-US" dirty="0"/>
+              <a:t> </a:t>
+            </a:r>
+          </a:p>
+        </p:txBody>
+      </p:sp>
+    </p:spTree>
+    <p:extLst>
+      <p:ext uri="{BB962C8B-B14F-4D97-AF65-F5344CB8AC3E}">
+        <p14:creationId xmlns:p14="http://schemas.microsoft.com/office/powerpoint/2010/main" val="2240541558"/>
+      </p:ext>
+    </p:extLst>
+  </p:cSld>
+  <p:clrMapOvr>
+    <a:masterClrMapping/>
+  </p:clrMapOvr>
+</p:sld>
+</file>
+
+<file path=ppt/slides/slide8.xml><?xml version="1.0" encoding="utf-8"?>
+<p:sld xmlns:a="http://schemas.openxmlformats.org/drawingml/2006/main" xmlns:r="http://schemas.openxmlformats.org/officeDocument/2006/relationships" xmlns:p="http://schemas.openxmlformats.org/presentationml/2006/main">
+  <p:cSld>
+    <p:spTree>
+      <p:nvGrpSpPr>
+        <p:cNvPr id="1" name=""/>
+        <p:cNvGrpSpPr/>
+        <p:nvPr/>
+      </p:nvGrpSpPr>
+      <p:grpSpPr>
+        <a:xfrm>
+          <a:off x="0" y="0"/>
+          <a:ext cx="0" cy="0"/>
+          <a:chOff x="0" y="0"/>
+          <a:chExt cx="0" cy="0"/>
+        </a:xfrm>
+      </p:grpSpPr>
+      <p:sp>
+        <p:nvSpPr>
+          <p:cNvPr id="2" name="Title 1">
+            <a:extLst>
+              <a:ext uri="{FF2B5EF4-FFF2-40B4-BE49-F238E27FC236}">
+                <a16:creationId xmlns:a16="http://schemas.microsoft.com/office/drawing/2014/main" id="{363A0985-42E4-D452-AE31-CAF39A46D7CA}"/>
+              </a:ext>
+            </a:extLst>
+          </p:cNvPr>
+          <p:cNvSpPr>
+            <a:spLocks noGrp="1"/>
+          </p:cNvSpPr>
+          <p:nvPr>
+            <p:ph type="title"/>
+          </p:nvPr>
+        </p:nvSpPr>
+        <p:spPr/>
+        <p:txBody>
+          <a:bodyPr/>
+          <a:lstStyle/>
+          <a:p>
+            <a:r>
+              <a:rPr lang="en-US" dirty="0"/>
+              <a:t>Junit – basic structure of a test</a:t>
+            </a:r>
+          </a:p>
+        </p:txBody>
+      </p:sp>
+      <p:sp>
+        <p:nvSpPr>
+          <p:cNvPr id="3" name="Content Placeholder 2">
+            <a:extLst>
+              <a:ext uri="{FF2B5EF4-FFF2-40B4-BE49-F238E27FC236}">
+                <a16:creationId xmlns:a16="http://schemas.microsoft.com/office/drawing/2014/main" id="{82485FD5-CF09-50D6-619F-782DA8526D8A}"/>
+              </a:ext>
+            </a:extLst>
+          </p:cNvPr>
+          <p:cNvSpPr>
+            <a:spLocks noGrp="1"/>
+          </p:cNvSpPr>
+          <p:nvPr>
+            <p:ph idx="1"/>
+          </p:nvPr>
+        </p:nvSpPr>
+        <p:spPr>
+          <a:xfrm>
+            <a:off x="6789107" y="2180496"/>
+            <a:ext cx="4821700" cy="3678303"/>
+          </a:xfrm>
+        </p:spPr>
+        <p:txBody>
+          <a:bodyPr/>
+          <a:lstStyle/>
+          <a:p>
+            <a:r>
+              <a:rPr lang="en-US" dirty="0"/>
+              <a:t>Arrange – Set up what the test needs</a:t>
+            </a:r>
+          </a:p>
+          <a:p>
+            <a:pPr lvl="1"/>
+            <a:r>
+              <a:rPr lang="en-US" dirty="0"/>
+              <a:t>Calculator </a:t>
+            </a:r>
+            <a:r>
+              <a:rPr lang="en-US" dirty="0" err="1"/>
+              <a:t>calculator</a:t>
+            </a:r>
+            <a:r>
+              <a:rPr lang="en-US" dirty="0"/>
+              <a:t> = new Calculator();</a:t>
+            </a:r>
+          </a:p>
+          <a:p>
+            <a:r>
+              <a:rPr lang="en-US" dirty="0"/>
+              <a:t>Act – Perform the operation you are testing</a:t>
+            </a:r>
+          </a:p>
+          <a:p>
+            <a:pPr lvl="1"/>
+            <a:r>
+              <a:rPr lang="en-US" dirty="0"/>
+              <a:t>int result = </a:t>
+            </a:r>
+            <a:r>
+              <a:rPr lang="en-US" dirty="0" err="1"/>
+              <a:t>calculator.add</a:t>
+            </a:r>
+            <a:r>
+              <a:rPr lang="en-US" dirty="0"/>
+              <a:t>(2, 3);</a:t>
+            </a:r>
+          </a:p>
+          <a:p>
+            <a:r>
+              <a:rPr lang="en-US" dirty="0"/>
+              <a:t>Assert – Check the result</a:t>
+            </a:r>
+          </a:p>
+          <a:p>
+            <a:pPr lvl="1"/>
+            <a:r>
+              <a:rPr lang="en-US" dirty="0" err="1"/>
+              <a:t>assertEquals</a:t>
+            </a:r>
+            <a:r>
+              <a:rPr lang="en-US" dirty="0"/>
+              <a:t>(5, result);</a:t>
+            </a:r>
+          </a:p>
+        </p:txBody>
+      </p:sp>
+      <p:sp>
+        <p:nvSpPr>
+          <p:cNvPr id="5" name="TextBox 4">
+            <a:extLst>
+              <a:ext uri="{FF2B5EF4-FFF2-40B4-BE49-F238E27FC236}">
+                <a16:creationId xmlns:a16="http://schemas.microsoft.com/office/drawing/2014/main" id="{4249D814-97C9-362F-8C98-263915ABCADA}"/>
+              </a:ext>
+            </a:extLst>
+          </p:cNvPr>
+          <p:cNvSpPr txBox="1"/>
+          <p:nvPr/>
+        </p:nvSpPr>
+        <p:spPr>
+          <a:xfrm>
+            <a:off x="1294878" y="2516243"/>
+            <a:ext cx="5494229" cy="3416320"/>
+          </a:xfrm>
+          <a:prstGeom prst="rect">
+            <a:avLst/>
+          </a:prstGeom>
+          <a:noFill/>
+        </p:spPr>
+        <p:txBody>
+          <a:bodyPr wrap="square">
+            <a:spAutoFit/>
+          </a:bodyPr>
+          <a:lstStyle/>
+          <a:p>
+            <a:r>
+              <a:rPr lang="en-US" dirty="0"/>
+              <a:t>import static </a:t>
+            </a:r>
+            <a:r>
+              <a:rPr lang="en-US" dirty="0" err="1"/>
+              <a:t>org.junit.jupiter.api.Assertions</a:t>
+            </a:r>
+            <a:r>
+              <a:rPr lang="en-US" dirty="0"/>
+              <a:t>.*;</a:t>
+            </a:r>
+          </a:p>
+          <a:p>
+            <a:r>
+              <a:rPr lang="en-US" dirty="0"/>
+              <a:t>import </a:t>
+            </a:r>
+            <a:r>
+              <a:rPr lang="en-US" dirty="0" err="1"/>
+              <a:t>org.junit.jupiter.api.Test</a:t>
+            </a:r>
+            <a:r>
+              <a:rPr lang="en-US" dirty="0"/>
+              <a:t>;</a:t>
+            </a:r>
+          </a:p>
+          <a:p>
+            <a:endParaRPr lang="en-US" dirty="0"/>
+          </a:p>
+          <a:p>
+            <a:r>
+              <a:rPr lang="en-US" dirty="0"/>
+              <a:t>class </a:t>
+            </a:r>
+            <a:r>
+              <a:rPr lang="en-US" dirty="0" err="1"/>
+              <a:t>CalculatorTest</a:t>
+            </a:r>
+            <a:r>
+              <a:rPr lang="en-US" dirty="0"/>
+              <a:t> {</a:t>
+            </a:r>
+          </a:p>
+          <a:p>
+            <a:endParaRPr lang="en-US" dirty="0"/>
+          </a:p>
+          <a:p>
+            <a:r>
+              <a:rPr lang="en-US" dirty="0"/>
+              <a:t>    @Test</a:t>
+            </a:r>
+          </a:p>
+          <a:p>
+            <a:r>
+              <a:rPr lang="en-US" dirty="0"/>
+              <a:t>    void </a:t>
+            </a:r>
+            <a:r>
+              <a:rPr lang="en-US" dirty="0" err="1"/>
+              <a:t>add_shouldReturnSum</a:t>
+            </a:r>
+            <a:r>
+              <a:rPr lang="en-US" dirty="0"/>
+              <a:t>() {</a:t>
+            </a:r>
+          </a:p>
+          <a:p>
+            <a:r>
+              <a:rPr lang="en-US" dirty="0"/>
+              <a:t>        Calculator </a:t>
+            </a:r>
+            <a:r>
+              <a:rPr lang="en-US" dirty="0" err="1"/>
+              <a:t>calculator</a:t>
+            </a:r>
+            <a:r>
+              <a:rPr lang="en-US" dirty="0"/>
+              <a:t> = new Calculator();</a:t>
+            </a:r>
+          </a:p>
+          <a:p>
+            <a:pPr marL="324000" lvl="1">
+              <a:buClr>
+                <a:schemeClr val="accent2"/>
+              </a:buClr>
+              <a:buSzPct val="92000"/>
+            </a:pPr>
+            <a:r>
+              <a:rPr lang="en-US" dirty="0"/>
+              <a:t>   int result = </a:t>
+            </a:r>
+            <a:r>
+              <a:rPr lang="en-US" dirty="0" err="1"/>
+              <a:t>calculator.add</a:t>
+            </a:r>
+            <a:r>
+              <a:rPr lang="en-US" dirty="0"/>
+              <a:t>(2, 3);</a:t>
+            </a:r>
+          </a:p>
+          <a:p>
+            <a:r>
+              <a:rPr lang="en-US" dirty="0"/>
+              <a:t>        </a:t>
+            </a:r>
+            <a:r>
+              <a:rPr lang="en-US" dirty="0" err="1"/>
+              <a:t>assertEquals</a:t>
+            </a:r>
+            <a:r>
+              <a:rPr lang="en-US" dirty="0"/>
+              <a:t>(5, result);</a:t>
+            </a:r>
+          </a:p>
+          <a:p>
+            <a:r>
+              <a:rPr lang="en-US" dirty="0"/>
+              <a:t>    }</a:t>
+            </a:r>
+          </a:p>
+          <a:p>
+            <a:r>
+              <a:rPr lang="en-US" dirty="0"/>
+              <a:t>}</a:t>
+            </a:r>
+          </a:p>
+        </p:txBody>
+      </p:sp>
+    </p:spTree>
+    <p:extLst>
+      <p:ext uri="{BB962C8B-B14F-4D97-AF65-F5344CB8AC3E}">
+        <p14:creationId xmlns:p14="http://schemas.microsoft.com/office/powerpoint/2010/main" val="3288918719"/>
+      </p:ext>
+    </p:extLst>
+  </p:cSld>
+  <p:clrMapOvr>
+    <a:masterClrMapping/>
+  </p:clrMapOvr>
+</p:sld>
+</file>
+
+<file path=ppt/slides/slide9.xml><?xml version="1.0" encoding="utf-8"?>
+<p:sld xmlns:a="http://schemas.openxmlformats.org/drawingml/2006/main" xmlns:r="http://schemas.openxmlformats.org/officeDocument/2006/relationships" xmlns:p="http://schemas.openxmlformats.org/presentationml/2006/main">
+  <p:cSld>
+    <p:spTree>
+      <p:nvGrpSpPr>
+        <p:cNvPr id="1" name=""/>
+        <p:cNvGrpSpPr/>
+        <p:nvPr/>
+      </p:nvGrpSpPr>
+      <p:grpSpPr>
+        <a:xfrm>
+          <a:off x="0" y="0"/>
+          <a:ext cx="0" cy="0"/>
+          <a:chOff x="0" y="0"/>
+          <a:chExt cx="0" cy="0"/>
+        </a:xfrm>
+      </p:grpSpPr>
+      <p:sp>
+        <p:nvSpPr>
+          <p:cNvPr id="2" name="Title 1">
+            <a:extLst>
+              <a:ext uri="{FF2B5EF4-FFF2-40B4-BE49-F238E27FC236}">
+                <a16:creationId xmlns:a16="http://schemas.microsoft.com/office/drawing/2014/main" id="{5D2B1B71-F22F-ACCC-1FCC-0DE8A977271A}"/>
+              </a:ext>
+            </a:extLst>
+          </p:cNvPr>
+          <p:cNvSpPr>
+            <a:spLocks noGrp="1"/>
+          </p:cNvSpPr>
+          <p:nvPr>
+            <p:ph type="title"/>
+          </p:nvPr>
+        </p:nvSpPr>
+        <p:spPr/>
+        <p:txBody>
+          <a:bodyPr/>
+          <a:lstStyle/>
+          <a:p>
+            <a:r>
+              <a:rPr lang="en-US" dirty="0"/>
+              <a:t>Common types of JUNIT assertions</a:t>
+            </a:r>
+          </a:p>
+        </p:txBody>
+      </p:sp>
+      <p:sp>
+        <p:nvSpPr>
+          <p:cNvPr id="3" name="Content Placeholder 2">
+            <a:extLst>
+              <a:ext uri="{FF2B5EF4-FFF2-40B4-BE49-F238E27FC236}">
+                <a16:creationId xmlns:a16="http://schemas.microsoft.com/office/drawing/2014/main" id="{397A1446-6001-06B4-3324-643B36236D92}"/>
+              </a:ext>
+            </a:extLst>
+          </p:cNvPr>
+          <p:cNvSpPr>
+            <a:spLocks noGrp="1"/>
+          </p:cNvSpPr>
+          <p:nvPr>
+            <p:ph idx="1"/>
+          </p:nvPr>
+        </p:nvSpPr>
+        <p:spPr>
+          <a:xfrm>
+            <a:off x="4229496" y="1979113"/>
+            <a:ext cx="5103535" cy="4176732"/>
+          </a:xfrm>
+        </p:spPr>
+        <p:txBody>
+          <a:bodyPr>
+            <a:noAutofit/>
+          </a:bodyPr>
+          <a:lstStyle/>
+          <a:p>
+            <a:pPr marL="0" indent="0">
+              <a:buNone/>
+            </a:pPr>
+            <a:r>
+              <a:rPr lang="en-US" sz="1400" dirty="0" err="1"/>
+              <a:t>assertEquals</a:t>
+            </a:r>
+            <a:r>
+              <a:rPr lang="en-US" sz="1400" dirty="0"/>
+              <a:t>(expected, actual);</a:t>
+            </a:r>
+          </a:p>
+          <a:p>
+            <a:pPr marL="0" indent="0">
+              <a:buNone/>
+            </a:pPr>
+            <a:r>
+              <a:rPr lang="en-US" sz="1400" dirty="0" err="1"/>
+              <a:t>assertNotEquals</a:t>
+            </a:r>
+            <a:r>
+              <a:rPr lang="en-US" sz="1400" dirty="0"/>
+              <a:t>(unexpected, actual);</a:t>
+            </a:r>
+          </a:p>
+          <a:p>
+            <a:pPr marL="0" indent="0">
+              <a:buNone/>
+            </a:pPr>
+            <a:endParaRPr lang="en-US" sz="1400" dirty="0"/>
+          </a:p>
+          <a:p>
+            <a:pPr marL="0" indent="0">
+              <a:buNone/>
+            </a:pPr>
+            <a:r>
+              <a:rPr lang="en-US" sz="1400" dirty="0" err="1"/>
+              <a:t>assertTrue</a:t>
+            </a:r>
+            <a:r>
+              <a:rPr lang="en-US" sz="1400" dirty="0"/>
+              <a:t>(condition);</a:t>
+            </a:r>
+          </a:p>
+          <a:p>
+            <a:pPr marL="0" indent="0">
+              <a:buNone/>
+            </a:pPr>
+            <a:r>
+              <a:rPr lang="en-US" sz="1400" dirty="0" err="1"/>
+              <a:t>assertFalse</a:t>
+            </a:r>
+            <a:r>
+              <a:rPr lang="en-US" sz="1400" dirty="0"/>
+              <a:t>(condition);</a:t>
+            </a:r>
+          </a:p>
+          <a:p>
+            <a:pPr marL="0" indent="0">
+              <a:buNone/>
+            </a:pPr>
+            <a:endParaRPr lang="en-US" sz="1400" dirty="0"/>
+          </a:p>
+          <a:p>
+            <a:pPr marL="0" indent="0">
+              <a:buNone/>
+            </a:pPr>
+            <a:r>
+              <a:rPr lang="en-US" sz="1400" dirty="0" err="1"/>
+              <a:t>assertNull</a:t>
+            </a:r>
+            <a:r>
+              <a:rPr lang="en-US" sz="1400" dirty="0"/>
+              <a:t>(value);</a:t>
+            </a:r>
+          </a:p>
+          <a:p>
+            <a:pPr marL="0" indent="0">
+              <a:buNone/>
+            </a:pPr>
+            <a:r>
+              <a:rPr lang="en-US" sz="1400" dirty="0" err="1"/>
+              <a:t>assertNotNull</a:t>
+            </a:r>
+            <a:r>
+              <a:rPr lang="en-US" sz="1400" dirty="0"/>
+              <a:t>(value);</a:t>
+            </a:r>
+          </a:p>
+          <a:p>
+            <a:pPr marL="0" indent="0">
+              <a:buNone/>
+            </a:pPr>
+            <a:endParaRPr lang="en-US" sz="1400" dirty="0"/>
+          </a:p>
+          <a:p>
+            <a:pPr marL="0" indent="0">
+              <a:buNone/>
+            </a:pPr>
+            <a:r>
+              <a:rPr lang="en-US" sz="1400" dirty="0" err="1"/>
+              <a:t>assertThrows</a:t>
+            </a:r>
+            <a:r>
+              <a:rPr lang="en-US" sz="1400" dirty="0"/>
+              <a:t>(</a:t>
+            </a:r>
+          </a:p>
+          <a:p>
+            <a:pPr marL="0" indent="0">
+              <a:buNone/>
+            </a:pPr>
+            <a:r>
+              <a:rPr lang="en-US" sz="1400" dirty="0"/>
+              <a:t>    </a:t>
+            </a:r>
+            <a:r>
+              <a:rPr lang="en-US" sz="1400" dirty="0" err="1"/>
+              <a:t>SomeException.class</a:t>
+            </a:r>
+            <a:r>
+              <a:rPr lang="en-US" sz="1400" dirty="0"/>
+              <a:t>,</a:t>
+            </a:r>
+          </a:p>
+          <a:p>
+            <a:pPr marL="0" indent="0">
+              <a:buNone/>
+            </a:pPr>
+            <a:r>
+              <a:rPr lang="en-US" sz="1400" dirty="0"/>
+              <a:t>    () -&gt; </a:t>
+            </a:r>
+            <a:r>
+              <a:rPr lang="en-US" sz="1400" dirty="0" err="1"/>
+              <a:t>someOperation</a:t>
+            </a:r>
+            <a:r>
+              <a:rPr lang="en-US" sz="1400" dirty="0"/>
+              <a:t>()</a:t>
+            </a:r>
+          </a:p>
+          <a:p>
+            <a:pPr marL="0" indent="0">
+              <a:buNone/>
+            </a:pPr>
+            <a:r>
+              <a:rPr lang="en-US" sz="1400" dirty="0"/>
+              <a:t>);</a:t>
+            </a:r>
+          </a:p>
+        </p:txBody>
+      </p:sp>
+    </p:spTree>
+    <p:extLst>
+      <p:ext uri="{BB962C8B-B14F-4D97-AF65-F5344CB8AC3E}">
+        <p14:creationId xmlns:p14="http://schemas.microsoft.com/office/powerpoint/2010/main" val="15184083"/>
       </p:ext>
     </p:extLst>
   </p:cSld>

--- a/Week_4/Unit_Testing_&_Logging.pptx
+++ b/Week_4/Unit_Testing_&_Logging.pptx
@@ -20,7 +20,14 @@
     <p:sldId id="273" r:id="rId14"/>
     <p:sldId id="276" r:id="rId15"/>
     <p:sldId id="275" r:id="rId16"/>
-    <p:sldId id="262" r:id="rId17"/>
+    <p:sldId id="277" r:id="rId17"/>
+    <p:sldId id="278" r:id="rId18"/>
+    <p:sldId id="279" r:id="rId19"/>
+    <p:sldId id="280" r:id="rId20"/>
+    <p:sldId id="281" r:id="rId21"/>
+    <p:sldId id="283" r:id="rId22"/>
+    <p:sldId id="282" r:id="rId23"/>
+    <p:sldId id="262" r:id="rId24"/>
   </p:sldIdLst>
   <p:sldSz cx="12192000" cy="6858000"/>
   <p:notesSz cx="6858000" cy="9144000"/>
@@ -387,7 +394,7 @@
             <a:fld id="{B61BEF0D-F0BB-DE4B-95CE-6DB70DBA9567}" type="datetimeFigureOut">
               <a:rPr lang="en-US" dirty="0"/>
               <a:pPr/>
-              <a:t>9/16/2026</a:t>
+              <a:t>9/17/2026</a:t>
             </a:fld>
             <a:endParaRPr lang="en-US" dirty="0"/>
           </a:p>
@@ -649,7 +656,7 @@
             <a:fld id="{B61BEF0D-F0BB-DE4B-95CE-6DB70DBA9567}" type="datetimeFigureOut">
               <a:rPr lang="en-US" dirty="0"/>
               <a:pPr/>
-              <a:t>9/16/2026</a:t>
+              <a:t>9/17/2026</a:t>
             </a:fld>
             <a:endParaRPr lang="en-US" dirty="0"/>
           </a:p>
@@ -884,7 +891,7 @@
             <a:fld id="{B61BEF0D-F0BB-DE4B-95CE-6DB70DBA9567}" type="datetimeFigureOut">
               <a:rPr lang="en-US" dirty="0"/>
               <a:pPr/>
-              <a:t>9/16/2026</a:t>
+              <a:t>9/17/2026</a:t>
             </a:fld>
             <a:endParaRPr lang="en-US" dirty="0"/>
           </a:p>
@@ -1131,7 +1138,7 @@
             <a:fld id="{B61BEF0D-F0BB-DE4B-95CE-6DB70DBA9567}" type="datetimeFigureOut">
               <a:rPr lang="en-US" dirty="0"/>
               <a:pPr/>
-              <a:t>9/16/2026</a:t>
+              <a:t>9/17/2026</a:t>
             </a:fld>
             <a:endParaRPr lang="en-US" dirty="0"/>
           </a:p>
@@ -1439,7 +1446,7 @@
             <a:fld id="{B61BEF0D-F0BB-DE4B-95CE-6DB70DBA9567}" type="datetimeFigureOut">
               <a:rPr lang="en-US" dirty="0"/>
               <a:pPr/>
-              <a:t>9/16/2026</a:t>
+              <a:t>9/17/2026</a:t>
             </a:fld>
             <a:endParaRPr lang="en-US" dirty="0"/>
           </a:p>
@@ -1740,7 +1747,7 @@
             <a:fld id="{B61BEF0D-F0BB-DE4B-95CE-6DB70DBA9567}" type="datetimeFigureOut">
               <a:rPr lang="en-US" dirty="0"/>
               <a:pPr/>
-              <a:t>9/16/2026</a:t>
+              <a:t>9/17/2026</a:t>
             </a:fld>
             <a:endParaRPr lang="en-US" dirty="0"/>
           </a:p>
@@ -2161,7 +2168,7 @@
             <a:fld id="{B61BEF0D-F0BB-DE4B-95CE-6DB70DBA9567}" type="datetimeFigureOut">
               <a:rPr lang="en-US" dirty="0"/>
               <a:pPr/>
-              <a:t>9/16/2026</a:t>
+              <a:t>9/17/2026</a:t>
             </a:fld>
             <a:endParaRPr lang="en-US" dirty="0"/>
           </a:p>
@@ -2324,7 +2331,7 @@
             <a:fld id="{B61BEF0D-F0BB-DE4B-95CE-6DB70DBA9567}" type="datetimeFigureOut">
               <a:rPr lang="en-US" dirty="0"/>
               <a:pPr/>
-              <a:t>9/16/2026</a:t>
+              <a:t>9/17/2026</a:t>
             </a:fld>
             <a:endParaRPr lang="en-US" dirty="0"/>
           </a:p>
@@ -2421,7 +2428,7 @@
             <a:fld id="{B61BEF0D-F0BB-DE4B-95CE-6DB70DBA9567}" type="datetimeFigureOut">
               <a:rPr lang="en-US" dirty="0"/>
               <a:pPr/>
-              <a:t>9/16/2026</a:t>
+              <a:t>9/17/2026</a:t>
             </a:fld>
             <a:endParaRPr lang="en-US" dirty="0"/>
           </a:p>
@@ -2799,7 +2806,7 @@
             <a:fld id="{B61BEF0D-F0BB-DE4B-95CE-6DB70DBA9567}" type="datetimeFigureOut">
               <a:rPr lang="en-US" dirty="0"/>
               <a:pPr/>
-              <a:t>9/16/2026</a:t>
+              <a:t>9/17/2026</a:t>
             </a:fld>
             <a:endParaRPr lang="en-US" dirty="0"/>
           </a:p>
@@ -3085,7 +3092,7 @@
             <a:fld id="{B61BEF0D-F0BB-DE4B-95CE-6DB70DBA9567}" type="datetimeFigureOut">
               <a:rPr lang="en-US" dirty="0"/>
               <a:pPr/>
-              <a:t>9/16/2026</a:t>
+              <a:t>9/17/2026</a:t>
             </a:fld>
             <a:endParaRPr lang="en-US" dirty="0"/>
           </a:p>
@@ -3324,7 +3331,7 @@
             <a:fld id="{B61BEF0D-F0BB-DE4B-95CE-6DB70DBA9567}" type="datetimeFigureOut">
               <a:rPr lang="en-US" dirty="0"/>
               <a:pPr/>
-              <a:t>9/16/2026</a:t>
+              <a:t>9/17/2026</a:t>
             </a:fld>
             <a:endParaRPr lang="en-US" dirty="0"/>
           </a:p>
@@ -5158,6 +5165,1251 @@
 </file>
 
 <file path=ppt/slides/slide16.xml><?xml version="1.0" encoding="utf-8"?>
+<p:sld xmlns:a="http://schemas.openxmlformats.org/drawingml/2006/main" xmlns:r="http://schemas.openxmlformats.org/officeDocument/2006/relationships" xmlns:p="http://schemas.openxmlformats.org/presentationml/2006/main">
+  <p:cSld>
+    <p:spTree>
+      <p:nvGrpSpPr>
+        <p:cNvPr id="1" name=""/>
+        <p:cNvGrpSpPr/>
+        <p:nvPr/>
+      </p:nvGrpSpPr>
+      <p:grpSpPr>
+        <a:xfrm>
+          <a:off x="0" y="0"/>
+          <a:ext cx="0" cy="0"/>
+          <a:chOff x="0" y="0"/>
+          <a:chExt cx="0" cy="0"/>
+        </a:xfrm>
+      </p:grpSpPr>
+      <p:sp>
+        <p:nvSpPr>
+          <p:cNvPr id="2" name="Title 1">
+            <a:extLst>
+              <a:ext uri="{FF2B5EF4-FFF2-40B4-BE49-F238E27FC236}">
+                <a16:creationId xmlns:a16="http://schemas.microsoft.com/office/drawing/2014/main" id="{F32F5A5C-48E2-75B4-0E81-30A74667D2D7}"/>
+              </a:ext>
+            </a:extLst>
+          </p:cNvPr>
+          <p:cNvSpPr>
+            <a:spLocks noGrp="1"/>
+          </p:cNvSpPr>
+          <p:nvPr>
+            <p:ph type="title"/>
+          </p:nvPr>
+        </p:nvSpPr>
+        <p:spPr/>
+        <p:txBody>
+          <a:bodyPr/>
+          <a:lstStyle/>
+          <a:p>
+            <a:r>
+              <a:rPr lang="en-US" dirty="0"/>
+              <a:t>Logging</a:t>
+            </a:r>
+          </a:p>
+        </p:txBody>
+      </p:sp>
+      <p:sp>
+        <p:nvSpPr>
+          <p:cNvPr id="3" name="Content Placeholder 2">
+            <a:extLst>
+              <a:ext uri="{FF2B5EF4-FFF2-40B4-BE49-F238E27FC236}">
+                <a16:creationId xmlns:a16="http://schemas.microsoft.com/office/drawing/2014/main" id="{CCDB6FA0-3815-ECF8-4FE6-C6D983365132}"/>
+              </a:ext>
+            </a:extLst>
+          </p:cNvPr>
+          <p:cNvSpPr>
+            <a:spLocks noGrp="1"/>
+          </p:cNvSpPr>
+          <p:nvPr>
+            <p:ph idx="1"/>
+          </p:nvPr>
+        </p:nvSpPr>
+        <p:spPr/>
+        <p:txBody>
+          <a:bodyPr>
+            <a:normAutofit/>
+          </a:bodyPr>
+          <a:lstStyle/>
+          <a:p>
+            <a:r>
+              <a:rPr lang="en-US" dirty="0"/>
+              <a:t>Logging is the process of recording information about what happens inside an application as it runs</a:t>
+            </a:r>
+          </a:p>
+          <a:p>
+            <a:r>
+              <a:rPr lang="en-US" dirty="0"/>
+              <a:t>Instead of using </a:t>
+            </a:r>
+            <a:r>
+              <a:rPr lang="en-US" dirty="0" err="1"/>
+              <a:t>System.out.println</a:t>
+            </a:r>
+            <a:r>
+              <a:rPr lang="en-US" dirty="0"/>
+              <a:t>() to print messages, applications typically use a </a:t>
+            </a:r>
+            <a:r>
+              <a:rPr lang="en-US" b="1" dirty="0"/>
+              <a:t>logging framework</a:t>
+            </a:r>
+            <a:r>
+              <a:rPr lang="en-US" dirty="0"/>
+              <a:t> to record events such as:</a:t>
+            </a:r>
+          </a:p>
+          <a:p>
+            <a:pPr lvl="1"/>
+            <a:r>
+              <a:rPr lang="en-US" dirty="0"/>
+              <a:t>Application startup and shutdown</a:t>
+            </a:r>
+          </a:p>
+          <a:p>
+            <a:pPr lvl="1"/>
+            <a:r>
+              <a:rPr lang="en-US" dirty="0"/>
+              <a:t>User actions</a:t>
+            </a:r>
+          </a:p>
+          <a:p>
+            <a:pPr lvl="1"/>
+            <a:r>
+              <a:rPr lang="en-US" dirty="0"/>
+              <a:t>Errors and exceptions</a:t>
+            </a:r>
+          </a:p>
+          <a:p>
+            <a:pPr lvl="1"/>
+            <a:r>
+              <a:rPr lang="en-US" dirty="0"/>
+              <a:t>Database or network operations</a:t>
+            </a:r>
+          </a:p>
+          <a:p>
+            <a:pPr lvl="1"/>
+            <a:r>
+              <a:rPr lang="en-US" dirty="0"/>
+              <a:t>Debugging information</a:t>
+            </a:r>
+          </a:p>
+          <a:p>
+            <a:pPr lvl="1"/>
+            <a:r>
+              <a:rPr lang="en-US" dirty="0"/>
+              <a:t>Warnings about potential problems</a:t>
+            </a:r>
+          </a:p>
+        </p:txBody>
+      </p:sp>
+    </p:spTree>
+    <p:extLst>
+      <p:ext uri="{BB962C8B-B14F-4D97-AF65-F5344CB8AC3E}">
+        <p14:creationId xmlns:p14="http://schemas.microsoft.com/office/powerpoint/2010/main" val="1379383044"/>
+      </p:ext>
+    </p:extLst>
+  </p:cSld>
+  <p:clrMapOvr>
+    <a:masterClrMapping/>
+  </p:clrMapOvr>
+</p:sld>
+</file>
+
+<file path=ppt/slides/slide17.xml><?xml version="1.0" encoding="utf-8"?>
+<p:sld xmlns:a="http://schemas.openxmlformats.org/drawingml/2006/main" xmlns:r="http://schemas.openxmlformats.org/officeDocument/2006/relationships" xmlns:p="http://schemas.openxmlformats.org/presentationml/2006/main">
+  <p:cSld>
+    <p:spTree>
+      <p:nvGrpSpPr>
+        <p:cNvPr id="1" name=""/>
+        <p:cNvGrpSpPr/>
+        <p:nvPr/>
+      </p:nvGrpSpPr>
+      <p:grpSpPr>
+        <a:xfrm>
+          <a:off x="0" y="0"/>
+          <a:ext cx="0" cy="0"/>
+          <a:chOff x="0" y="0"/>
+          <a:chExt cx="0" cy="0"/>
+        </a:xfrm>
+      </p:grpSpPr>
+      <p:sp>
+        <p:nvSpPr>
+          <p:cNvPr id="2" name="Title 1">
+            <a:extLst>
+              <a:ext uri="{FF2B5EF4-FFF2-40B4-BE49-F238E27FC236}">
+                <a16:creationId xmlns:a16="http://schemas.microsoft.com/office/drawing/2014/main" id="{84D51B2D-4121-AB82-0694-8D806D181591}"/>
+              </a:ext>
+            </a:extLst>
+          </p:cNvPr>
+          <p:cNvSpPr>
+            <a:spLocks noGrp="1"/>
+          </p:cNvSpPr>
+          <p:nvPr>
+            <p:ph type="title"/>
+          </p:nvPr>
+        </p:nvSpPr>
+        <p:spPr/>
+        <p:txBody>
+          <a:bodyPr/>
+          <a:lstStyle/>
+          <a:p>
+            <a:r>
+              <a:rPr lang="en-US" dirty="0"/>
+              <a:t>SLF4j</a:t>
+            </a:r>
+          </a:p>
+        </p:txBody>
+      </p:sp>
+      <p:sp>
+        <p:nvSpPr>
+          <p:cNvPr id="3" name="Content Placeholder 2">
+            <a:extLst>
+              <a:ext uri="{FF2B5EF4-FFF2-40B4-BE49-F238E27FC236}">
+                <a16:creationId xmlns:a16="http://schemas.microsoft.com/office/drawing/2014/main" id="{B542CB80-2F57-A811-A4DB-5780524C8D8F}"/>
+              </a:ext>
+            </a:extLst>
+          </p:cNvPr>
+          <p:cNvSpPr>
+            <a:spLocks noGrp="1"/>
+          </p:cNvSpPr>
+          <p:nvPr>
+            <p:ph idx="1"/>
+          </p:nvPr>
+        </p:nvSpPr>
+        <p:spPr>
+          <a:xfrm>
+            <a:off x="581193" y="2180496"/>
+            <a:ext cx="5907290" cy="4069992"/>
+          </a:xfrm>
+        </p:spPr>
+        <p:txBody>
+          <a:bodyPr/>
+          <a:lstStyle/>
+          <a:p>
+            <a:r>
+              <a:rPr lang="en-US" b="1" dirty="0"/>
+              <a:t>SLF4J</a:t>
+            </a:r>
+            <a:r>
+              <a:rPr lang="en-US" dirty="0"/>
+              <a:t> stands for </a:t>
+            </a:r>
+            <a:r>
+              <a:rPr lang="en-US" b="1" dirty="0"/>
+              <a:t>Simple Logging Facade for Java</a:t>
+            </a:r>
+            <a:r>
+              <a:rPr lang="en-US" dirty="0"/>
+              <a:t>.</a:t>
+            </a:r>
+          </a:p>
+          <a:p>
+            <a:r>
+              <a:rPr lang="en-US" dirty="0"/>
+              <a:t>It is </a:t>
+            </a:r>
+            <a:r>
+              <a:rPr lang="en-US" b="1" dirty="0"/>
+              <a:t>not itself a logging implementation</a:t>
+            </a:r>
+            <a:r>
+              <a:rPr lang="en-US" dirty="0"/>
+              <a:t>. Instead, it provides a common API that Java applications can use to write logs without being tied to a particular logging framework.</a:t>
+            </a:r>
+          </a:p>
+          <a:p>
+            <a:r>
+              <a:rPr lang="en-US" dirty="0"/>
+              <a:t>SLF4J is the interface we use for logging. </a:t>
+            </a:r>
+          </a:p>
+          <a:p>
+            <a:pPr lvl="1"/>
+            <a:r>
+              <a:rPr lang="en-US" dirty="0"/>
+              <a:t>This allows you to change the underlying logging implementation without changing all of your application's logging code.</a:t>
+            </a:r>
+          </a:p>
+        </p:txBody>
+      </p:sp>
+      <p:sp>
+        <p:nvSpPr>
+          <p:cNvPr id="5" name="TextBox 4">
+            <a:extLst>
+              <a:ext uri="{FF2B5EF4-FFF2-40B4-BE49-F238E27FC236}">
+                <a16:creationId xmlns:a16="http://schemas.microsoft.com/office/drawing/2014/main" id="{10EAD4D4-0C99-5235-F189-DE575B10BFFF}"/>
+              </a:ext>
+            </a:extLst>
+          </p:cNvPr>
+          <p:cNvSpPr txBox="1"/>
+          <p:nvPr/>
+        </p:nvSpPr>
+        <p:spPr>
+          <a:xfrm>
+            <a:off x="6605914" y="2385433"/>
+            <a:ext cx="4855401" cy="3139321"/>
+          </a:xfrm>
+          <a:prstGeom prst="rect">
+            <a:avLst/>
+          </a:prstGeom>
+          <a:noFill/>
+        </p:spPr>
+        <p:txBody>
+          <a:bodyPr wrap="square">
+            <a:spAutoFit/>
+          </a:bodyPr>
+          <a:lstStyle/>
+          <a:p>
+            <a:r>
+              <a:rPr lang="en-US" dirty="0"/>
+              <a:t>import org.slf4j.Logger;</a:t>
+            </a:r>
+          </a:p>
+          <a:p>
+            <a:r>
+              <a:rPr lang="en-US" dirty="0"/>
+              <a:t>import org.slf4j.LoggerFactory;</a:t>
+            </a:r>
+          </a:p>
+          <a:p>
+            <a:endParaRPr lang="en-US" dirty="0"/>
+          </a:p>
+          <a:p>
+            <a:r>
+              <a:rPr lang="en-US" dirty="0"/>
+              <a:t>public class </a:t>
+            </a:r>
+            <a:r>
+              <a:rPr lang="en-US" dirty="0" err="1"/>
+              <a:t>MyService</a:t>
+            </a:r>
+            <a:r>
+              <a:rPr lang="en-US" dirty="0"/>
+              <a:t> {</a:t>
+            </a:r>
+          </a:p>
+          <a:p>
+            <a:r>
+              <a:rPr lang="en-US" dirty="0"/>
+              <a:t>    private static final Logger </a:t>
+            </a:r>
+            <a:r>
+              <a:rPr lang="en-US" dirty="0" err="1"/>
+              <a:t>logger</a:t>
+            </a:r>
+            <a:r>
+              <a:rPr lang="en-US" dirty="0"/>
+              <a:t> =</a:t>
+            </a:r>
+          </a:p>
+          <a:p>
+            <a:r>
+              <a:rPr lang="en-US" dirty="0"/>
+              <a:t>        </a:t>
+            </a:r>
+            <a:r>
+              <a:rPr lang="en-US" dirty="0" err="1"/>
+              <a:t>LoggerFactory.getLogger</a:t>
+            </a:r>
+            <a:r>
+              <a:rPr lang="en-US" dirty="0"/>
+              <a:t>(</a:t>
+            </a:r>
+            <a:r>
+              <a:rPr lang="en-US" dirty="0" err="1"/>
+              <a:t>MyService.class</a:t>
+            </a:r>
+            <a:r>
+              <a:rPr lang="en-US" dirty="0"/>
+              <a:t>);</a:t>
+            </a:r>
+          </a:p>
+          <a:p>
+            <a:endParaRPr lang="en-US" dirty="0"/>
+          </a:p>
+          <a:p>
+            <a:r>
+              <a:rPr lang="en-US" dirty="0"/>
+              <a:t>    public void </a:t>
+            </a:r>
+            <a:r>
+              <a:rPr lang="en-US" dirty="0" err="1"/>
+              <a:t>doSomething</a:t>
+            </a:r>
+            <a:r>
+              <a:rPr lang="en-US" dirty="0"/>
+              <a:t>() {</a:t>
+            </a:r>
+          </a:p>
+          <a:p>
+            <a:r>
+              <a:rPr lang="en-US" dirty="0"/>
+              <a:t>        logger.info("Doing something");</a:t>
+            </a:r>
+          </a:p>
+          <a:p>
+            <a:r>
+              <a:rPr lang="en-US" dirty="0"/>
+              <a:t>    }</a:t>
+            </a:r>
+          </a:p>
+          <a:p>
+            <a:r>
+              <a:rPr lang="en-US" dirty="0"/>
+              <a:t>}</a:t>
+            </a:r>
+          </a:p>
+        </p:txBody>
+      </p:sp>
+    </p:spTree>
+    <p:extLst>
+      <p:ext uri="{BB962C8B-B14F-4D97-AF65-F5344CB8AC3E}">
+        <p14:creationId xmlns:p14="http://schemas.microsoft.com/office/powerpoint/2010/main" val="284443580"/>
+      </p:ext>
+    </p:extLst>
+  </p:cSld>
+  <p:clrMapOvr>
+    <a:masterClrMapping/>
+  </p:clrMapOvr>
+</p:sld>
+</file>
+
+<file path=ppt/slides/slide18.xml><?xml version="1.0" encoding="utf-8"?>
+<p:sld xmlns:a="http://schemas.openxmlformats.org/drawingml/2006/main" xmlns:r="http://schemas.openxmlformats.org/officeDocument/2006/relationships" xmlns:p="http://schemas.openxmlformats.org/presentationml/2006/main">
+  <p:cSld>
+    <p:spTree>
+      <p:nvGrpSpPr>
+        <p:cNvPr id="1" name=""/>
+        <p:cNvGrpSpPr/>
+        <p:nvPr/>
+      </p:nvGrpSpPr>
+      <p:grpSpPr>
+        <a:xfrm>
+          <a:off x="0" y="0"/>
+          <a:ext cx="0" cy="0"/>
+          <a:chOff x="0" y="0"/>
+          <a:chExt cx="0" cy="0"/>
+        </a:xfrm>
+      </p:grpSpPr>
+      <p:sp>
+        <p:nvSpPr>
+          <p:cNvPr id="2" name="Title 1">
+            <a:extLst>
+              <a:ext uri="{FF2B5EF4-FFF2-40B4-BE49-F238E27FC236}">
+                <a16:creationId xmlns:a16="http://schemas.microsoft.com/office/drawing/2014/main" id="{58E9010B-37B1-4A42-D8DA-FEC2A1B23289}"/>
+              </a:ext>
+            </a:extLst>
+          </p:cNvPr>
+          <p:cNvSpPr>
+            <a:spLocks noGrp="1"/>
+          </p:cNvSpPr>
+          <p:nvPr>
+            <p:ph type="title"/>
+          </p:nvPr>
+        </p:nvSpPr>
+        <p:spPr/>
+        <p:txBody>
+          <a:bodyPr/>
+          <a:lstStyle/>
+          <a:p>
+            <a:r>
+              <a:rPr lang="en-US" dirty="0"/>
+              <a:t>LOGback</a:t>
+            </a:r>
+          </a:p>
+        </p:txBody>
+      </p:sp>
+      <p:sp>
+        <p:nvSpPr>
+          <p:cNvPr id="3" name="Content Placeholder 2">
+            <a:extLst>
+              <a:ext uri="{FF2B5EF4-FFF2-40B4-BE49-F238E27FC236}">
+                <a16:creationId xmlns:a16="http://schemas.microsoft.com/office/drawing/2014/main" id="{8AC867E4-1826-1D90-E57B-861175057336}"/>
+              </a:ext>
+            </a:extLst>
+          </p:cNvPr>
+          <p:cNvSpPr>
+            <a:spLocks noGrp="1"/>
+          </p:cNvSpPr>
+          <p:nvPr>
+            <p:ph idx="1"/>
+          </p:nvPr>
+        </p:nvSpPr>
+        <p:spPr>
+          <a:xfrm>
+            <a:off x="581192" y="2180496"/>
+            <a:ext cx="11029615" cy="3894627"/>
+          </a:xfrm>
+        </p:spPr>
+        <p:txBody>
+          <a:bodyPr/>
+          <a:lstStyle/>
+          <a:p>
+            <a:r>
+              <a:rPr lang="en-US" b="1" dirty="0"/>
+              <a:t>Logback</a:t>
+            </a:r>
+            <a:r>
+              <a:rPr lang="en-US" dirty="0"/>
+              <a:t> is a </a:t>
+            </a:r>
+            <a:r>
+              <a:rPr lang="en-US" b="1" dirty="0"/>
+              <a:t>logging implementation/framework for Java</a:t>
+            </a:r>
+            <a:r>
+              <a:rPr lang="en-US" dirty="0"/>
+              <a:t>.</a:t>
+            </a:r>
+          </a:p>
+          <a:p>
+            <a:r>
+              <a:rPr lang="en-US" dirty="0"/>
+              <a:t>It performs the work of processing log messages and deciding things such as:</a:t>
+            </a:r>
+          </a:p>
+          <a:p>
+            <a:pPr lvl="1"/>
+            <a:r>
+              <a:rPr lang="en-US" dirty="0"/>
+              <a:t>Where logs should go</a:t>
+            </a:r>
+          </a:p>
+          <a:p>
+            <a:pPr lvl="1"/>
+            <a:r>
+              <a:rPr lang="en-US" dirty="0"/>
+              <a:t>Which log levels should be recorded</a:t>
+            </a:r>
+          </a:p>
+          <a:p>
+            <a:pPr lvl="1"/>
+            <a:r>
+              <a:rPr lang="en-US" dirty="0"/>
+              <a:t>How logs should be formatted</a:t>
+            </a:r>
+          </a:p>
+          <a:p>
+            <a:pPr lvl="1"/>
+            <a:r>
+              <a:rPr lang="en-US" dirty="0"/>
+              <a:t>Whether logs should be written to files</a:t>
+            </a:r>
+          </a:p>
+          <a:p>
+            <a:pPr lvl="1"/>
+            <a:r>
+              <a:rPr lang="en-US" dirty="0"/>
+              <a:t>When log files should be rotated</a:t>
+            </a:r>
+          </a:p>
+        </p:txBody>
+      </p:sp>
+    </p:spTree>
+    <p:extLst>
+      <p:ext uri="{BB962C8B-B14F-4D97-AF65-F5344CB8AC3E}">
+        <p14:creationId xmlns:p14="http://schemas.microsoft.com/office/powerpoint/2010/main" val="308402"/>
+      </p:ext>
+    </p:extLst>
+  </p:cSld>
+  <p:clrMapOvr>
+    <a:masterClrMapping/>
+  </p:clrMapOvr>
+</p:sld>
+</file>
+
+<file path=ppt/slides/slide19.xml><?xml version="1.0" encoding="utf-8"?>
+<p:sld xmlns:a="http://schemas.openxmlformats.org/drawingml/2006/main" xmlns:r="http://schemas.openxmlformats.org/officeDocument/2006/relationships" xmlns:p="http://schemas.openxmlformats.org/presentationml/2006/main">
+  <p:cSld>
+    <p:spTree>
+      <p:nvGrpSpPr>
+        <p:cNvPr id="1" name=""/>
+        <p:cNvGrpSpPr/>
+        <p:nvPr/>
+      </p:nvGrpSpPr>
+      <p:grpSpPr>
+        <a:xfrm>
+          <a:off x="0" y="0"/>
+          <a:ext cx="0" cy="0"/>
+          <a:chOff x="0" y="0"/>
+          <a:chExt cx="0" cy="0"/>
+        </a:xfrm>
+      </p:grpSpPr>
+      <p:sp>
+        <p:nvSpPr>
+          <p:cNvPr id="2" name="Title 1">
+            <a:extLst>
+              <a:ext uri="{FF2B5EF4-FFF2-40B4-BE49-F238E27FC236}">
+                <a16:creationId xmlns:a16="http://schemas.microsoft.com/office/drawing/2014/main" id="{016C8F7D-8BE1-9B56-4A46-45EBB4FF09A2}"/>
+              </a:ext>
+            </a:extLst>
+          </p:cNvPr>
+          <p:cNvSpPr>
+            <a:spLocks noGrp="1"/>
+          </p:cNvSpPr>
+          <p:nvPr>
+            <p:ph type="title"/>
+          </p:nvPr>
+        </p:nvSpPr>
+        <p:spPr/>
+        <p:txBody>
+          <a:bodyPr/>
+          <a:lstStyle/>
+          <a:p>
+            <a:r>
+              <a:rPr lang="en-US" dirty="0"/>
+              <a:t>SLF4J + LOGback setup</a:t>
+            </a:r>
+          </a:p>
+        </p:txBody>
+      </p:sp>
+      <p:sp>
+        <p:nvSpPr>
+          <p:cNvPr id="3" name="Content Placeholder 2">
+            <a:extLst>
+              <a:ext uri="{FF2B5EF4-FFF2-40B4-BE49-F238E27FC236}">
+                <a16:creationId xmlns:a16="http://schemas.microsoft.com/office/drawing/2014/main" id="{16F878EE-47C2-6322-9BC0-89AC0A7FD7E7}"/>
+              </a:ext>
+            </a:extLst>
+          </p:cNvPr>
+          <p:cNvSpPr>
+            <a:spLocks noGrp="1"/>
+          </p:cNvSpPr>
+          <p:nvPr>
+            <p:ph idx="1"/>
+          </p:nvPr>
+        </p:nvSpPr>
+        <p:spPr>
+          <a:xfrm>
+            <a:off x="581192" y="2180496"/>
+            <a:ext cx="4761159" cy="3678303"/>
+          </a:xfrm>
+        </p:spPr>
+        <p:txBody>
+          <a:bodyPr/>
+          <a:lstStyle/>
+          <a:p>
+            <a:r>
+              <a:rPr lang="en-US" dirty="0"/>
+              <a:t>Maven: we add the required dependencies</a:t>
+            </a:r>
+          </a:p>
+          <a:p>
+            <a:r>
+              <a:rPr lang="en-US" dirty="0"/>
+              <a:t>Then for Logback, we setup the XML file to configure settings</a:t>
+            </a:r>
+          </a:p>
+        </p:txBody>
+      </p:sp>
+      <p:pic>
+        <p:nvPicPr>
+          <p:cNvPr id="5" name="Picture 4">
+            <a:extLst>
+              <a:ext uri="{FF2B5EF4-FFF2-40B4-BE49-F238E27FC236}">
+                <a16:creationId xmlns:a16="http://schemas.microsoft.com/office/drawing/2014/main" id="{D117BC6C-F630-5BEA-61DB-976A0F84934F}"/>
+              </a:ext>
+            </a:extLst>
+          </p:cNvPr>
+          <p:cNvPicPr>
+            <a:picLocks noChangeAspect="1"/>
+          </p:cNvPicPr>
+          <p:nvPr/>
+        </p:nvPicPr>
+        <p:blipFill>
+          <a:blip r:embed="rId2"/>
+          <a:stretch>
+            <a:fillRect/>
+          </a:stretch>
+        </p:blipFill>
+        <p:spPr>
+          <a:xfrm>
+            <a:off x="6849651" y="2225121"/>
+            <a:ext cx="4725570" cy="2916924"/>
+          </a:xfrm>
+          <a:prstGeom prst="rect">
+            <a:avLst/>
+          </a:prstGeom>
+        </p:spPr>
+      </p:pic>
+      <p:pic>
+        <p:nvPicPr>
+          <p:cNvPr id="7" name="Picture 6">
+            <a:extLst>
+              <a:ext uri="{FF2B5EF4-FFF2-40B4-BE49-F238E27FC236}">
+                <a16:creationId xmlns:a16="http://schemas.microsoft.com/office/drawing/2014/main" id="{504AE991-3F8D-9390-EC6B-8F3EACB6524A}"/>
+              </a:ext>
+            </a:extLst>
+          </p:cNvPr>
+          <p:cNvPicPr>
+            <a:picLocks noChangeAspect="1"/>
+          </p:cNvPicPr>
+          <p:nvPr/>
+        </p:nvPicPr>
+        <p:blipFill>
+          <a:blip r:embed="rId3"/>
+          <a:stretch>
+            <a:fillRect/>
+          </a:stretch>
+        </p:blipFill>
+        <p:spPr>
+          <a:xfrm>
+            <a:off x="8097855" y="5311035"/>
+            <a:ext cx="2229161" cy="1095528"/>
+          </a:xfrm>
+          <a:prstGeom prst="rect">
+            <a:avLst/>
+          </a:prstGeom>
+        </p:spPr>
+      </p:pic>
+    </p:spTree>
+    <p:extLst>
+      <p:ext uri="{BB962C8B-B14F-4D97-AF65-F5344CB8AC3E}">
+        <p14:creationId xmlns:p14="http://schemas.microsoft.com/office/powerpoint/2010/main" val="2254714526"/>
+      </p:ext>
+    </p:extLst>
+  </p:cSld>
+  <p:clrMapOvr>
+    <a:masterClrMapping/>
+  </p:clrMapOvr>
+</p:sld>
+</file>
+
+<file path=ppt/slides/slide2.xml><?xml version="1.0" encoding="utf-8"?>
+<p:sld xmlns:a="http://schemas.openxmlformats.org/drawingml/2006/main" xmlns:r="http://schemas.openxmlformats.org/officeDocument/2006/relationships" xmlns:p="http://schemas.openxmlformats.org/presentationml/2006/main">
+  <p:cSld>
+    <p:spTree>
+      <p:nvGrpSpPr>
+        <p:cNvPr id="1" name=""/>
+        <p:cNvGrpSpPr/>
+        <p:nvPr/>
+      </p:nvGrpSpPr>
+      <p:grpSpPr>
+        <a:xfrm>
+          <a:off x="0" y="0"/>
+          <a:ext cx="0" cy="0"/>
+          <a:chOff x="0" y="0"/>
+          <a:chExt cx="0" cy="0"/>
+        </a:xfrm>
+      </p:grpSpPr>
+      <p:sp>
+        <p:nvSpPr>
+          <p:cNvPr id="2" name="Title 1">
+            <a:extLst>
+              <a:ext uri="{FF2B5EF4-FFF2-40B4-BE49-F238E27FC236}">
+                <a16:creationId xmlns:a16="http://schemas.microsoft.com/office/drawing/2014/main" id="{4857AA5D-C488-43A5-3D64-B1D6D0512005}"/>
+              </a:ext>
+            </a:extLst>
+          </p:cNvPr>
+          <p:cNvSpPr>
+            <a:spLocks noGrp="1"/>
+          </p:cNvSpPr>
+          <p:nvPr>
+            <p:ph type="title"/>
+          </p:nvPr>
+        </p:nvSpPr>
+        <p:spPr/>
+        <p:txBody>
+          <a:bodyPr/>
+          <a:lstStyle/>
+          <a:p>
+            <a:r>
+              <a:rPr lang="en-US" dirty="0"/>
+              <a:t>Unit Testing</a:t>
+            </a:r>
+          </a:p>
+        </p:txBody>
+      </p:sp>
+      <p:sp>
+        <p:nvSpPr>
+          <p:cNvPr id="3" name="Content Placeholder 2">
+            <a:extLst>
+              <a:ext uri="{FF2B5EF4-FFF2-40B4-BE49-F238E27FC236}">
+                <a16:creationId xmlns:a16="http://schemas.microsoft.com/office/drawing/2014/main" id="{453E4FDB-A8F2-71B7-3D5E-5E3B4C62CE16}"/>
+              </a:ext>
+            </a:extLst>
+          </p:cNvPr>
+          <p:cNvSpPr>
+            <a:spLocks noGrp="1"/>
+          </p:cNvSpPr>
+          <p:nvPr>
+            <p:ph idx="1"/>
+          </p:nvPr>
+        </p:nvSpPr>
+        <p:spPr/>
+        <p:txBody>
+          <a:bodyPr/>
+          <a:lstStyle/>
+          <a:p>
+            <a:r>
+              <a:rPr lang="en-US" dirty="0"/>
+              <a:t>Unit testing is the practice of testing a small, isolated piece of software</a:t>
+            </a:r>
+          </a:p>
+          <a:p>
+            <a:pPr lvl="1"/>
+            <a:r>
+              <a:rPr lang="en-US" dirty="0"/>
+              <a:t>Isolation – dependencies are often replaced with mocks to only test the method/class itself. i.e. test a service &amp; mock the repo/DAO it uses</a:t>
+            </a:r>
+          </a:p>
+          <a:p>
+            <a:pPr lvl="1"/>
+            <a:r>
+              <a:rPr lang="en-US" dirty="0"/>
+              <a:t>Automation – tests can be run repeatedly and automatically, such as when build the project or deploy </a:t>
+            </a:r>
+          </a:p>
+          <a:p>
+            <a:pPr lvl="1"/>
+            <a:r>
+              <a:rPr lang="en-US" dirty="0"/>
+              <a:t>Fast feedback – since unit tests are small, they run quickly, allowing us to get fast feedback after code changes</a:t>
+            </a:r>
+          </a:p>
+        </p:txBody>
+      </p:sp>
+    </p:spTree>
+    <p:extLst>
+      <p:ext uri="{BB962C8B-B14F-4D97-AF65-F5344CB8AC3E}">
+        <p14:creationId xmlns:p14="http://schemas.microsoft.com/office/powerpoint/2010/main" val="1270905194"/>
+      </p:ext>
+    </p:extLst>
+  </p:cSld>
+  <p:clrMapOvr>
+    <a:masterClrMapping/>
+  </p:clrMapOvr>
+</p:sld>
+</file>
+
+<file path=ppt/slides/slide20.xml><?xml version="1.0" encoding="utf-8"?>
+<p:sld xmlns:a="http://schemas.openxmlformats.org/drawingml/2006/main" xmlns:r="http://schemas.openxmlformats.org/officeDocument/2006/relationships" xmlns:p="http://schemas.openxmlformats.org/presentationml/2006/main">
+  <p:cSld>
+    <p:spTree>
+      <p:nvGrpSpPr>
+        <p:cNvPr id="1" name=""/>
+        <p:cNvGrpSpPr/>
+        <p:nvPr/>
+      </p:nvGrpSpPr>
+      <p:grpSpPr>
+        <a:xfrm>
+          <a:off x="0" y="0"/>
+          <a:ext cx="0" cy="0"/>
+          <a:chOff x="0" y="0"/>
+          <a:chExt cx="0" cy="0"/>
+        </a:xfrm>
+      </p:grpSpPr>
+      <p:sp>
+        <p:nvSpPr>
+          <p:cNvPr id="2" name="Title 1">
+            <a:extLst>
+              <a:ext uri="{FF2B5EF4-FFF2-40B4-BE49-F238E27FC236}">
+                <a16:creationId xmlns:a16="http://schemas.microsoft.com/office/drawing/2014/main" id="{24C08D60-FE6C-CBF5-54CC-A29425012A90}"/>
+              </a:ext>
+            </a:extLst>
+          </p:cNvPr>
+          <p:cNvSpPr>
+            <a:spLocks noGrp="1"/>
+          </p:cNvSpPr>
+          <p:nvPr>
+            <p:ph type="title"/>
+          </p:nvPr>
+        </p:nvSpPr>
+        <p:spPr/>
+        <p:txBody>
+          <a:bodyPr/>
+          <a:lstStyle/>
+          <a:p>
+            <a:r>
+              <a:rPr lang="en-US" dirty="0"/>
+              <a:t>Logback xml</a:t>
+            </a:r>
+          </a:p>
+        </p:txBody>
+      </p:sp>
+      <p:sp>
+        <p:nvSpPr>
+          <p:cNvPr id="3" name="Content Placeholder 2">
+            <a:extLst>
+              <a:ext uri="{FF2B5EF4-FFF2-40B4-BE49-F238E27FC236}">
+                <a16:creationId xmlns:a16="http://schemas.microsoft.com/office/drawing/2014/main" id="{F580B581-53C9-E1D9-9B4A-BA259889753C}"/>
+              </a:ext>
+            </a:extLst>
+          </p:cNvPr>
+          <p:cNvSpPr>
+            <a:spLocks noGrp="1"/>
+          </p:cNvSpPr>
+          <p:nvPr>
+            <p:ph idx="1"/>
+          </p:nvPr>
+        </p:nvSpPr>
+        <p:spPr>
+          <a:xfrm>
+            <a:off x="581192" y="2477541"/>
+            <a:ext cx="4941784" cy="3678303"/>
+          </a:xfrm>
+        </p:spPr>
+        <p:txBody>
+          <a:bodyPr/>
+          <a:lstStyle/>
+          <a:p>
+            <a:r>
+              <a:rPr lang="en-US" dirty="0"/>
+              <a:t>In the Logback XML, we configure settings for the logging implementation</a:t>
+            </a:r>
+          </a:p>
+          <a:p>
+            <a:pPr lvl="1"/>
+            <a:r>
+              <a:rPr lang="en-US" dirty="0"/>
+              <a:t>File or Console output?</a:t>
+            </a:r>
+          </a:p>
+          <a:p>
+            <a:pPr lvl="1"/>
+            <a:r>
+              <a:rPr lang="en-US" dirty="0"/>
+              <a:t>The log pattern printed to each line</a:t>
+            </a:r>
+          </a:p>
+          <a:p>
+            <a:pPr lvl="1"/>
+            <a:r>
+              <a:rPr lang="en-US" dirty="0"/>
+              <a:t>File rollover behavior</a:t>
+            </a:r>
+          </a:p>
+          <a:p>
+            <a:pPr lvl="1"/>
+            <a:r>
+              <a:rPr lang="en-US" dirty="0"/>
+              <a:t>Set minimum captured log levels</a:t>
+            </a:r>
+          </a:p>
+          <a:p>
+            <a:pPr lvl="1"/>
+            <a:r>
+              <a:rPr lang="en-US" dirty="0"/>
+              <a:t>See the file in your course materials for more info (</a:t>
+            </a:r>
+            <a:r>
+              <a:rPr lang="en-US" dirty="0" err="1"/>
+              <a:t>cleancodeWithJDBC</a:t>
+            </a:r>
+            <a:r>
+              <a:rPr lang="en-US" dirty="0"/>
+              <a:t> project)</a:t>
+            </a:r>
+          </a:p>
+        </p:txBody>
+      </p:sp>
+      <p:pic>
+        <p:nvPicPr>
+          <p:cNvPr id="7" name="Picture 6">
+            <a:extLst>
+              <a:ext uri="{FF2B5EF4-FFF2-40B4-BE49-F238E27FC236}">
+                <a16:creationId xmlns:a16="http://schemas.microsoft.com/office/drawing/2014/main" id="{AE53F10F-BB94-27E4-A449-8160AF7BBDBB}"/>
+              </a:ext>
+            </a:extLst>
+          </p:cNvPr>
+          <p:cNvPicPr>
+            <a:picLocks noChangeAspect="1"/>
+          </p:cNvPicPr>
+          <p:nvPr/>
+        </p:nvPicPr>
+        <p:blipFill>
+          <a:blip r:embed="rId2"/>
+          <a:stretch>
+            <a:fillRect/>
+          </a:stretch>
+        </p:blipFill>
+        <p:spPr>
+          <a:xfrm>
+            <a:off x="5810159" y="3249723"/>
+            <a:ext cx="5677692" cy="1324160"/>
+          </a:xfrm>
+          <a:prstGeom prst="rect">
+            <a:avLst/>
+          </a:prstGeom>
+        </p:spPr>
+      </p:pic>
+    </p:spTree>
+    <p:extLst>
+      <p:ext uri="{BB962C8B-B14F-4D97-AF65-F5344CB8AC3E}">
+        <p14:creationId xmlns:p14="http://schemas.microsoft.com/office/powerpoint/2010/main" val="527413057"/>
+      </p:ext>
+    </p:extLst>
+  </p:cSld>
+  <p:clrMapOvr>
+    <a:masterClrMapping/>
+  </p:clrMapOvr>
+</p:sld>
+</file>
+
+<file path=ppt/slides/slide21.xml><?xml version="1.0" encoding="utf-8"?>
+<p:sld xmlns:a="http://schemas.openxmlformats.org/drawingml/2006/main" xmlns:r="http://schemas.openxmlformats.org/officeDocument/2006/relationships" xmlns:p="http://schemas.openxmlformats.org/presentationml/2006/main">
+  <p:cSld>
+    <p:spTree>
+      <p:nvGrpSpPr>
+        <p:cNvPr id="1" name=""/>
+        <p:cNvGrpSpPr/>
+        <p:nvPr/>
+      </p:nvGrpSpPr>
+      <p:grpSpPr>
+        <a:xfrm>
+          <a:off x="0" y="0"/>
+          <a:ext cx="0" cy="0"/>
+          <a:chOff x="0" y="0"/>
+          <a:chExt cx="0" cy="0"/>
+        </a:xfrm>
+      </p:grpSpPr>
+      <p:sp>
+        <p:nvSpPr>
+          <p:cNvPr id="2" name="Title 1">
+            <a:extLst>
+              <a:ext uri="{FF2B5EF4-FFF2-40B4-BE49-F238E27FC236}">
+                <a16:creationId xmlns:a16="http://schemas.microsoft.com/office/drawing/2014/main" id="{37257A5B-F5B6-D991-AAD0-4A362389499D}"/>
+              </a:ext>
+            </a:extLst>
+          </p:cNvPr>
+          <p:cNvSpPr>
+            <a:spLocks noGrp="1"/>
+          </p:cNvSpPr>
+          <p:nvPr>
+            <p:ph type="title"/>
+          </p:nvPr>
+        </p:nvSpPr>
+        <p:spPr/>
+        <p:txBody>
+          <a:bodyPr/>
+          <a:lstStyle/>
+          <a:p>
+            <a:r>
+              <a:rPr lang="en-US" dirty="0"/>
+              <a:t>Where should we log?</a:t>
+            </a:r>
+          </a:p>
+        </p:txBody>
+      </p:sp>
+      <p:sp>
+        <p:nvSpPr>
+          <p:cNvPr id="3" name="Content Placeholder 2">
+            <a:extLst>
+              <a:ext uri="{FF2B5EF4-FFF2-40B4-BE49-F238E27FC236}">
+                <a16:creationId xmlns:a16="http://schemas.microsoft.com/office/drawing/2014/main" id="{0CE0B3D0-43A0-E262-101E-94604B074951}"/>
+              </a:ext>
+            </a:extLst>
+          </p:cNvPr>
+          <p:cNvSpPr>
+            <a:spLocks noGrp="1"/>
+          </p:cNvSpPr>
+          <p:nvPr>
+            <p:ph idx="1"/>
+          </p:nvPr>
+        </p:nvSpPr>
+        <p:spPr>
+          <a:xfrm>
+            <a:off x="581193" y="2180496"/>
+            <a:ext cx="5153924" cy="4286141"/>
+          </a:xfrm>
+        </p:spPr>
+        <p:txBody>
+          <a:bodyPr/>
+          <a:lstStyle/>
+          <a:p>
+            <a:r>
+              <a:rPr lang="en-US" dirty="0"/>
+              <a:t>Most logging occurs at the service layer (with the business logic)</a:t>
+            </a:r>
+          </a:p>
+          <a:p>
+            <a:pPr lvl="1"/>
+            <a:r>
+              <a:rPr lang="en-US" dirty="0"/>
+              <a:t>“Order #1234 successfully placed”</a:t>
+            </a:r>
+          </a:p>
+          <a:p>
+            <a:pPr lvl="1"/>
+            <a:r>
+              <a:rPr lang="en-US" dirty="0"/>
+              <a:t>“User password reset initiated for User ID: 1” </a:t>
+            </a:r>
+          </a:p>
+          <a:p>
+            <a:r>
+              <a:rPr lang="en-US" dirty="0"/>
+              <a:t>Repository/DAO level logging:</a:t>
+            </a:r>
+          </a:p>
+          <a:p>
+            <a:pPr lvl="1"/>
+            <a:r>
+              <a:rPr lang="en-US" dirty="0"/>
+              <a:t>Keep it lean</a:t>
+            </a:r>
+          </a:p>
+          <a:p>
+            <a:pPr lvl="1"/>
+            <a:r>
+              <a:rPr lang="en-US" dirty="0"/>
+              <a:t>Avoid boilerplate such as “Saving User to database” </a:t>
+            </a:r>
+          </a:p>
+          <a:p>
+            <a:pPr lvl="1"/>
+            <a:r>
+              <a:rPr lang="en-US" dirty="0"/>
+              <a:t>Log custom complexity such as performance bottlenecks or specific database recovery logic</a:t>
+            </a:r>
+          </a:p>
+        </p:txBody>
+      </p:sp>
+      <p:pic>
+        <p:nvPicPr>
+          <p:cNvPr id="5" name="Picture 4">
+            <a:extLst>
+              <a:ext uri="{FF2B5EF4-FFF2-40B4-BE49-F238E27FC236}">
+                <a16:creationId xmlns:a16="http://schemas.microsoft.com/office/drawing/2014/main" id="{F09FB771-A2C7-2231-B795-8640B9BFCC82}"/>
+              </a:ext>
+            </a:extLst>
+          </p:cNvPr>
+          <p:cNvPicPr>
+            <a:picLocks noChangeAspect="1"/>
+          </p:cNvPicPr>
+          <p:nvPr/>
+        </p:nvPicPr>
+        <p:blipFill>
+          <a:blip r:embed="rId2"/>
+          <a:stretch>
+            <a:fillRect/>
+          </a:stretch>
+        </p:blipFill>
+        <p:spPr>
+          <a:xfrm>
+            <a:off x="5947258" y="3280483"/>
+            <a:ext cx="5792808" cy="1781444"/>
+          </a:xfrm>
+          <a:prstGeom prst="rect">
+            <a:avLst/>
+          </a:prstGeom>
+        </p:spPr>
+      </p:pic>
+    </p:spTree>
+    <p:extLst>
+      <p:ext uri="{BB962C8B-B14F-4D97-AF65-F5344CB8AC3E}">
+        <p14:creationId xmlns:p14="http://schemas.microsoft.com/office/powerpoint/2010/main" val="1737598714"/>
+      </p:ext>
+    </p:extLst>
+  </p:cSld>
+  <p:clrMapOvr>
+    <a:masterClrMapping/>
+  </p:clrMapOvr>
+</p:sld>
+</file>
+
+<file path=ppt/slides/slide22.xml><?xml version="1.0" encoding="utf-8"?>
+<p:sld xmlns:a="http://schemas.openxmlformats.org/drawingml/2006/main" xmlns:r="http://schemas.openxmlformats.org/officeDocument/2006/relationships" xmlns:p="http://schemas.openxmlformats.org/presentationml/2006/main">
+  <p:cSld>
+    <p:spTree>
+      <p:nvGrpSpPr>
+        <p:cNvPr id="1" name=""/>
+        <p:cNvGrpSpPr/>
+        <p:nvPr/>
+      </p:nvGrpSpPr>
+      <p:grpSpPr>
+        <a:xfrm>
+          <a:off x="0" y="0"/>
+          <a:ext cx="0" cy="0"/>
+          <a:chOff x="0" y="0"/>
+          <a:chExt cx="0" cy="0"/>
+        </a:xfrm>
+      </p:grpSpPr>
+      <p:sp>
+        <p:nvSpPr>
+          <p:cNvPr id="2" name="Title 1">
+            <a:extLst>
+              <a:ext uri="{FF2B5EF4-FFF2-40B4-BE49-F238E27FC236}">
+                <a16:creationId xmlns:a16="http://schemas.microsoft.com/office/drawing/2014/main" id="{B210B693-37D5-4E29-FB63-494E692BA633}"/>
+              </a:ext>
+            </a:extLst>
+          </p:cNvPr>
+          <p:cNvSpPr>
+            <a:spLocks noGrp="1"/>
+          </p:cNvSpPr>
+          <p:nvPr>
+            <p:ph type="title"/>
+          </p:nvPr>
+        </p:nvSpPr>
+        <p:spPr/>
+        <p:txBody>
+          <a:bodyPr/>
+          <a:lstStyle/>
+          <a:p>
+            <a:r>
+              <a:rPr lang="en-US" dirty="0"/>
+              <a:t>STOP</a:t>
+            </a:r>
+          </a:p>
+        </p:txBody>
+      </p:sp>
+      <p:sp>
+        <p:nvSpPr>
+          <p:cNvPr id="3" name="Content Placeholder 2">
+            <a:extLst>
+              <a:ext uri="{FF2B5EF4-FFF2-40B4-BE49-F238E27FC236}">
+                <a16:creationId xmlns:a16="http://schemas.microsoft.com/office/drawing/2014/main" id="{42DD19FD-77E0-8806-9F06-C7662C63FE5E}"/>
+              </a:ext>
+            </a:extLst>
+          </p:cNvPr>
+          <p:cNvSpPr>
+            <a:spLocks noGrp="1"/>
+          </p:cNvSpPr>
+          <p:nvPr>
+            <p:ph idx="1"/>
+          </p:nvPr>
+        </p:nvSpPr>
+        <p:spPr/>
+        <p:txBody>
+          <a:bodyPr/>
+          <a:lstStyle/>
+          <a:p>
+            <a:r>
+              <a:rPr lang="en-US" dirty="0"/>
+              <a:t>Demo logging here</a:t>
+            </a:r>
+          </a:p>
+          <a:p>
+            <a:r>
+              <a:rPr lang="en-US" dirty="0"/>
+              <a:t>Please see the </a:t>
+            </a:r>
+            <a:r>
+              <a:rPr lang="en-US" dirty="0" err="1"/>
+              <a:t>cleancodeWithJDBC</a:t>
+            </a:r>
+            <a:r>
+              <a:rPr lang="en-US" dirty="0"/>
+              <a:t> project in your course materials for examples</a:t>
+            </a:r>
+          </a:p>
+        </p:txBody>
+      </p:sp>
+    </p:spTree>
+    <p:extLst>
+      <p:ext uri="{BB962C8B-B14F-4D97-AF65-F5344CB8AC3E}">
+        <p14:creationId xmlns:p14="http://schemas.microsoft.com/office/powerpoint/2010/main" val="3078750666"/>
+      </p:ext>
+    </p:extLst>
+  </p:cSld>
+  <p:clrMapOvr>
+    <a:masterClrMapping/>
+  </p:clrMapOvr>
+</p:sld>
+</file>
+
+<file path=ppt/slides/slide23.xml><?xml version="1.0" encoding="utf-8"?>
 <p:sld xmlns:a="http://schemas.openxmlformats.org/drawingml/2006/main" xmlns:r="http://schemas.openxmlformats.org/officeDocument/2006/relationships" xmlns:p="http://schemas.openxmlformats.org/presentationml/2006/main" show="0">
   <p:cSld>
     <p:spTree>
@@ -5550,113 +6802,6 @@
     <p:extLst>
       <p:ext uri="{BB962C8B-B14F-4D97-AF65-F5344CB8AC3E}">
         <p14:creationId xmlns:p14="http://schemas.microsoft.com/office/powerpoint/2010/main" val="3587871389"/>
-      </p:ext>
-    </p:extLst>
-  </p:cSld>
-  <p:clrMapOvr>
-    <a:masterClrMapping/>
-  </p:clrMapOvr>
-</p:sld>
-</file>
-
-<file path=ppt/slides/slide2.xml><?xml version="1.0" encoding="utf-8"?>
-<p:sld xmlns:a="http://schemas.openxmlformats.org/drawingml/2006/main" xmlns:r="http://schemas.openxmlformats.org/officeDocument/2006/relationships" xmlns:p="http://schemas.openxmlformats.org/presentationml/2006/main">
-  <p:cSld>
-    <p:spTree>
-      <p:nvGrpSpPr>
-        <p:cNvPr id="1" name=""/>
-        <p:cNvGrpSpPr/>
-        <p:nvPr/>
-      </p:nvGrpSpPr>
-      <p:grpSpPr>
-        <a:xfrm>
-          <a:off x="0" y="0"/>
-          <a:ext cx="0" cy="0"/>
-          <a:chOff x="0" y="0"/>
-          <a:chExt cx="0" cy="0"/>
-        </a:xfrm>
-      </p:grpSpPr>
-      <p:sp>
-        <p:nvSpPr>
-          <p:cNvPr id="2" name="Title 1">
-            <a:extLst>
-              <a:ext uri="{FF2B5EF4-FFF2-40B4-BE49-F238E27FC236}">
-                <a16:creationId xmlns:a16="http://schemas.microsoft.com/office/drawing/2014/main" id="{4857AA5D-C488-43A5-3D64-B1D6D0512005}"/>
-              </a:ext>
-            </a:extLst>
-          </p:cNvPr>
-          <p:cNvSpPr>
-            <a:spLocks noGrp="1"/>
-          </p:cNvSpPr>
-          <p:nvPr>
-            <p:ph type="title"/>
-          </p:nvPr>
-        </p:nvSpPr>
-        <p:spPr/>
-        <p:txBody>
-          <a:bodyPr/>
-          <a:lstStyle/>
-          <a:p>
-            <a:r>
-              <a:rPr lang="en-US" dirty="0"/>
-              <a:t>Unit Testing</a:t>
-            </a:r>
-          </a:p>
-        </p:txBody>
-      </p:sp>
-      <p:sp>
-        <p:nvSpPr>
-          <p:cNvPr id="3" name="Content Placeholder 2">
-            <a:extLst>
-              <a:ext uri="{FF2B5EF4-FFF2-40B4-BE49-F238E27FC236}">
-                <a16:creationId xmlns:a16="http://schemas.microsoft.com/office/drawing/2014/main" id="{453E4FDB-A8F2-71B7-3D5E-5E3B4C62CE16}"/>
-              </a:ext>
-            </a:extLst>
-          </p:cNvPr>
-          <p:cNvSpPr>
-            <a:spLocks noGrp="1"/>
-          </p:cNvSpPr>
-          <p:nvPr>
-            <p:ph idx="1"/>
-          </p:nvPr>
-        </p:nvSpPr>
-        <p:spPr/>
-        <p:txBody>
-          <a:bodyPr/>
-          <a:lstStyle/>
-          <a:p>
-            <a:r>
-              <a:rPr lang="en-US" dirty="0"/>
-              <a:t>Unit testing is the practice of testing a small, isolated piece of software</a:t>
-            </a:r>
-          </a:p>
-          <a:p>
-            <a:pPr lvl="1"/>
-            <a:r>
-              <a:rPr lang="en-US" dirty="0"/>
-              <a:t>Isolation – dependencies are often replaced with mocks to only test the method/class itself. i.e. test a service &amp; mock the repo/DAO it uses</a:t>
-            </a:r>
-          </a:p>
-          <a:p>
-            <a:pPr lvl="1"/>
-            <a:r>
-              <a:rPr lang="en-US" dirty="0"/>
-              <a:t>Automation – tests can be run repeatedly and automatically, such as when build the project or deploy </a:t>
-            </a:r>
-          </a:p>
-          <a:p>
-            <a:pPr lvl="1"/>
-            <a:r>
-              <a:rPr lang="en-US" dirty="0"/>
-              <a:t>Fast feedback – since unit tests are small, they run quickly, allowing us to get fast feedback after code changes</a:t>
-            </a:r>
-          </a:p>
-        </p:txBody>
-      </p:sp>
-    </p:spTree>
-    <p:extLst>
-      <p:ext uri="{BB962C8B-B14F-4D97-AF65-F5344CB8AC3E}">
-        <p14:creationId xmlns:p14="http://schemas.microsoft.com/office/powerpoint/2010/main" val="1270905194"/>
       </p:ext>
     </p:extLst>
   </p:cSld>

--- a/Week_4/Unit_Testing_&_Logging.pptx
+++ b/Week_4/Unit_Testing_&_Logging.pptx
@@ -5783,16 +5783,74 @@
         <p:spPr>
           <a:xfrm>
             <a:off x="581192" y="2180496"/>
-            <a:ext cx="4761159" cy="3678303"/>
+            <a:ext cx="4761159" cy="3975348"/>
           </a:xfrm>
         </p:spPr>
         <p:txBody>
-          <a:bodyPr/>
+          <a:bodyPr>
+            <a:normAutofit lnSpcReduction="10000"/>
+          </a:bodyPr>
           <a:lstStyle/>
           <a:p>
             <a:r>
               <a:rPr lang="en-US" dirty="0"/>
               <a:t>Maven: we add the required dependencies</a:t>
+            </a:r>
+          </a:p>
+          <a:p>
+            <a:pPr lvl="1"/>
+            <a:r>
+              <a:rPr lang="en-US" dirty="0"/>
+              <a:t>slf4j-api – found on maven central, this is the </a:t>
+            </a:r>
+            <a:r>
+              <a:rPr lang="en-US" dirty="0" err="1"/>
+              <a:t>api</a:t>
+            </a:r>
+            <a:r>
+              <a:rPr lang="en-US" dirty="0"/>
+              <a:t> that we can directly interact with</a:t>
+            </a:r>
+          </a:p>
+          <a:p>
+            <a:pPr lvl="1"/>
+            <a:r>
+              <a:rPr lang="en-US" dirty="0" err="1"/>
+              <a:t>logback</a:t>
+            </a:r>
+            <a:r>
+              <a:rPr lang="en-US" dirty="0"/>
+              <a:t>-classic – found on maven central, this extends </a:t>
+            </a:r>
+            <a:r>
+              <a:rPr lang="en-US" dirty="0" err="1"/>
+              <a:t>logback</a:t>
+            </a:r>
+            <a:r>
+              <a:rPr lang="en-US" dirty="0"/>
+              <a:t>-core (so core will be added as a transitive dependency) </a:t>
+            </a:r>
+          </a:p>
+          <a:p>
+            <a:r>
+              <a:rPr lang="en-US" dirty="0"/>
+              <a:t>In maven central, you may also see: </a:t>
+            </a:r>
+            <a:r>
+              <a:rPr lang="en-US" dirty="0" err="1"/>
+              <a:t>logback</a:t>
+            </a:r>
+            <a:r>
+              <a:rPr lang="en-US" dirty="0"/>
+              <a:t>-access, a third component of Logback that we aren’t using here; used for servlet containers (</a:t>
+            </a:r>
+            <a:r>
+              <a:rPr lang="en-US" dirty="0" err="1"/>
+              <a:t>Tocat</a:t>
+            </a:r>
+            <a:r>
+              <a:rPr lang="en-US" dirty="0"/>
+              <a:t>/Jetty) for HTTP-access logging (operates at server/container level instead of application code)</a:t>
             </a:r>
           </a:p>
           <a:p>
